--- a/thesis/slides/進捗報告_20260817_v3_風力蓄電池.pptx
+++ b/thesis/slides/進捗報告_20260817_v3_風力蓄電池.pptx
@@ -17,9 +17,10 @@
     <p:sldId id="265" r:id="rId11"/>
     <p:sldId id="266" r:id="rId12"/>
     <p:sldId id="267" r:id="rId13"/>
+    <p:sldId id="268" r:id="rId14"/>
   </p:sldIdLst>
   <p:notesMasterIdLst>
-    <p:notesMasterId r:id="rId14"/>
+    <p:notesMasterId r:id="rId15"/>
   </p:notesMasterIdLst>
   <p:sldSz cx="12192000" cy="6858000"/>
   <p:notesSz cx="6858000" cy="12192000"/>
@@ -3782,6 +3783,94 @@
 </p:notes>
 </file>
 
+<file path=ppt/notesSlides/notesSlide13.xml><?xml version="1.0" encoding="utf-8"?>
+<p:notes xmlns:a="http://schemas.openxmlformats.org/drawingml/2006/main" xmlns:r="http://schemas.openxmlformats.org/officeDocument/2006/relationships" xmlns:p="http://schemas.openxmlformats.org/presentationml/2006/main">
+  <p:cSld>
+    <p:spTree>
+      <p:nvGrpSpPr>
+        <p:cNvPr id="1" name=""/>
+        <p:cNvGrpSpPr/>
+        <p:nvPr/>
+      </p:nvGrpSpPr>
+      <p:grpSpPr>
+        <a:xfrm>
+          <a:off x="0" y="0"/>
+          <a:ext cx="0" cy="0"/>
+          <a:chOff x="0" y="0"/>
+          <a:chExt cx="0" cy="0"/>
+        </a:xfrm>
+      </p:grpSpPr>
+      <p:sp>
+        <p:nvSpPr>
+          <p:cNvPr id="2" name="Slide Image Placeholder 1"/>
+          <p:cNvSpPr>
+            <a:spLocks noGrp="1" noRot="1" noChangeAspect="1"/>
+          </p:cNvSpPr>
+          <p:nvPr>
+            <p:ph type="sldImg"/>
+          </p:nvPr>
+        </p:nvSpPr>
+        <p:spPr/>
+      </p:sp>
+      <p:sp>
+        <p:nvSpPr>
+          <p:cNvPr id="3" name="Notes Placeholder 2"/>
+          <p:cNvSpPr>
+            <a:spLocks noGrp="1"/>
+          </p:cNvSpPr>
+          <p:nvPr>
+            <p:ph type="body" idx="1"/>
+          </p:nvPr>
+        </p:nvSpPr>
+        <p:spPr/>
+        <p:txBody>
+          <a:bodyPr/>
+          <a:lstStyle/>
+          <a:p>
+            <a:r>
+              <a:rPr lang="en-US" dirty="0"/>
+              <a:t/>
+            </a:r>
+            <a:endParaRPr lang="en-US" dirty="0"/>
+          </a:p>
+        </p:txBody>
+      </p:sp>
+      <p:sp>
+        <p:nvSpPr>
+          <p:cNvPr id="4" name="Slide Number Placeholder 3"/>
+          <p:cNvSpPr>
+            <a:spLocks noGrp="1"/>
+          </p:cNvSpPr>
+          <p:nvPr>
+            <p:ph type="sldNum" sz="quarter" idx="10"/>
+          </p:nvPr>
+        </p:nvSpPr>
+        <p:spPr/>
+        <p:txBody>
+          <a:bodyPr/>
+          <a:lstStyle/>
+          <a:p>
+            <a:fld id="{F7021451-1387-4CA6-816F-3879F97B5CBC}" type="slidenum">
+              <a:rPr lang="en-US"/>
+              <a:t>13</a:t>
+            </a:fld>
+            <a:endParaRPr lang="en-US"/>
+          </a:p>
+        </p:txBody>
+      </p:sp>
+    </p:spTree>
+    <p:extLst>
+      <p:ext uri="{BB962C8B-B14F-4D97-AF65-F5344CB8AC3E}">
+        <p14:creationId xmlns:p14="http://schemas.microsoft.com/office/powerpoint/2010/main" val="1024086991"/>
+      </p:ext>
+    </p:extLst>
+  </p:cSld>
+  <p:clrMapOvr>
+    <a:masterClrMapping/>
+  </p:clrMapOvr>
+</p:notes>
+</file>
+
 <file path=ppt/notesSlides/notesSlide2.xml><?xml version="1.0" encoding="utf-8"?>
 <p:notes xmlns:a="http://schemas.openxmlformats.org/drawingml/2006/main" xmlns:r="http://schemas.openxmlformats.org/officeDocument/2006/relationships" xmlns:p="http://schemas.openxmlformats.org/presentationml/2006/main">
   <p:cSld>
@@ -5622,6 +5711,3544 @@
                 <a:ea typeface="Noto Sans JP SemiBold" pitchFamily="34" charset="-122"/>
                 <a:cs typeface="Noto Sans JP SemiBold" pitchFamily="34" charset="-120"/>
               </a:rPr>
+              <a:t>対象の拡張 — 系統用（FTM）に加えて併設（BTM）という第2の柱</a:t>
+            </a:r>
+            <a:endParaRPr lang="en-US" sz="1900" dirty="0"/>
+          </a:p>
+        </p:txBody>
+      </p:sp>
+      <p:sp>
+        <p:nvSpPr>
+          <p:cNvPr id="4" name="Text 2"/>
+          <p:cNvSpPr/>
+          <p:nvPr/>
+        </p:nvSpPr>
+        <p:spPr>
+          <a:xfrm>
+            <a:off x="338328" y="621792"/>
+            <a:ext cx="11521440" cy="548640"/>
+          </a:xfrm>
+          <a:prstGeom prst="rect">
+            <a:avLst/>
+          </a:prstGeom>
+          <a:noFill/>
+          <a:ln/>
+        </p:spPr>
+        <p:txBody>
+          <a:bodyPr wrap="square" lIns="0" tIns="0" rIns="0" bIns="0" rtlCol="0" anchor="t"/>
+          <a:lstStyle/>
+          <a:p>
+            <a:pPr indent="0" marL="0">
+              <a:lnSpc>
+                <a:spcPct val="115000"/>
+              </a:lnSpc>
+              <a:buNone/>
+            </a:pPr>
+            <a:r>
+              <a:rPr lang="en-US" sz="1350" dirty="0">
+                <a:solidFill>
+                  <a:srgbClr val="262626"/>
+                </a:solidFill>
+                <a:latin typeface="Noto Sans JP" pitchFamily="34" charset="0"/>
+                <a:ea typeface="Noto Sans JP" pitchFamily="34" charset="-122"/>
+                <a:cs typeface="Noto Sans JP" pitchFamily="34" charset="-120"/>
+              </a:rPr>
+              <a:t>抑制の1割強は「エリア価格が高いのに」起きている ＝ エリア価格に映らないBTM固有の価値。当初対象（系統用）だけでは価値の総体を捉えられない</a:t>
+            </a:r>
+            <a:endParaRPr lang="en-US" sz="1350" dirty="0"/>
+          </a:p>
+        </p:txBody>
+      </p:sp>
+      <p:sp>
+        <p:nvSpPr>
+          <p:cNvPr id="5" name="Shape 3"/>
+          <p:cNvSpPr/>
+          <p:nvPr/>
+        </p:nvSpPr>
+        <p:spPr>
+          <a:xfrm>
+            <a:off x="338328" y="603504"/>
+            <a:ext cx="11521440" cy="0"/>
+          </a:xfrm>
+          <a:prstGeom prst="line">
+            <a:avLst/>
+          </a:prstGeom>
+          <a:noFill/>
+          <a:ln w="9525">
+            <a:solidFill>
+              <a:srgbClr val="D9D9D9"/>
+            </a:solidFill>
+            <a:prstDash val="solid"/>
+          </a:ln>
+        </p:spPr>
+      </p:sp>
+      <p:sp>
+        <p:nvSpPr>
+          <p:cNvPr id="6" name="Shape 4"/>
+          <p:cNvSpPr/>
+          <p:nvPr/>
+        </p:nvSpPr>
+        <p:spPr>
+          <a:xfrm>
+            <a:off x="548640" y="1344168"/>
+            <a:ext cx="45720" cy="274320"/>
+          </a:xfrm>
+          <a:prstGeom prst="rect">
+            <a:avLst/>
+          </a:prstGeom>
+          <a:solidFill>
+            <a:srgbClr val="0079C2"/>
+          </a:solidFill>
+          <a:ln/>
+        </p:spPr>
+      </p:sp>
+      <p:sp>
+        <p:nvSpPr>
+          <p:cNvPr id="7" name="Text 5"/>
+          <p:cNvSpPr/>
+          <p:nvPr/>
+        </p:nvSpPr>
+        <p:spPr>
+          <a:xfrm>
+            <a:off x="676656" y="1325880"/>
+            <a:ext cx="5760720" cy="310896"/>
+          </a:xfrm>
+          <a:prstGeom prst="rect">
+            <a:avLst/>
+          </a:prstGeom>
+          <a:noFill/>
+          <a:ln/>
+        </p:spPr>
+        <p:txBody>
+          <a:bodyPr wrap="square" lIns="0" tIns="0" rIns="0" bIns="0" rtlCol="0" anchor="ctr"/>
+          <a:lstStyle/>
+          <a:p>
+            <a:pPr indent="0" marL="0">
+              <a:buNone/>
+            </a:pPr>
+            <a:r>
+              <a:rPr lang="en-US" sz="1300" b="1" dirty="0">
+                <a:solidFill>
+                  <a:srgbClr val="000000"/>
+                </a:solidFill>
+                <a:latin typeface="Noto Sans JP SemiBold" pitchFamily="34" charset="0"/>
+                <a:ea typeface="Noto Sans JP SemiBold" pitchFamily="34" charset="-122"/>
+                <a:cs typeface="Noto Sans JP SemiBold" pitchFamily="34" charset="-120"/>
+              </a:rPr>
+              <a:t>根拠① 風力の出力制御が立ち上がった</a:t>
+            </a:r>
+            <a:endParaRPr lang="en-US" sz="1300" dirty="0"/>
+          </a:p>
+        </p:txBody>
+      </p:sp>
+      <p:graphicFrame>
+        <p:nvGraphicFramePr>
+          <p:cNvPr id="12" name="Table 0"/>
+          <p:cNvGraphicFramePr>
+            <a:graphicFrameLocks noGrp="1"/>
+          </p:cNvGraphicFramePr>
+          <p:nvPr>
+            <p:extLst>
+              <p:ext uri="{D42A27DB-BD31-4B8C-83A1-F6EECF244321}">
+                <p14:modId xmlns:p14="http://schemas.microsoft.com/office/powerpoint/2010/main" val="1579011935"/>
+              </p:ext>
+            </p:extLst>
+          </p:nvPr>
+        </p:nvGraphicFramePr>
+        <p:xfrm>
+          <a:off x="548640" y="1691640"/>
+          <a:ext cx="5852160" cy="914400"/>
+        </p:xfrm>
+        <a:graphic>
+          <a:graphicData uri="http://schemas.openxmlformats.org/drawingml/2006/table">
+            <a:tbl>
+              <a:tblPr/>
+              <a:tblGrid>
+                <a:gridCol w="2011680"/>
+                <a:gridCol w="914400"/>
+                <a:gridCol w="914400"/>
+                <a:gridCol w="914400"/>
+                <a:gridCol w="1097280"/>
+              </a:tblGrid>
+              <a:tr h="347472">
+                <a:tc>
+                  <a:txBody>
+                    <a:bodyPr/>
+                    <a:lstStyle/>
+                    <a:p>
+                      <a:pPr indent="0" marL="0">
+                        <a:buNone/>
+                      </a:pPr>
+                      <a:endParaRPr lang="en-US" sz="1000" dirty="0">
+                        <a:latin typeface="Noto Sans JP" charset="0"/>
+                        <a:ea typeface="Noto Sans JP" charset="0"/>
+                        <a:cs typeface="Noto Sans JP" charset="0"/>
+                      </a:endParaRPr>
+                    </a:p>
+                  </a:txBody>
+                  <a:tcPr marL="45720" marR="45720" marT="45720" marB="45720" anchor="ctr">
+                    <a:lnL w="6350" cap="flat" cmpd="sng" algn="ctr">
+                      <a:solidFill>
+                        <a:srgbClr val="D9D9D9"/>
+                      </a:solidFill>
+                      <a:prstDash val="solid"/>
+                      <a:round/>
+                      <a:headEnd type="none" w="med" len="med"/>
+                      <a:tailEnd type="none" w="med" len="med"/>
+                    </a:lnL>
+                    <a:lnR w="6350" cap="flat" cmpd="sng" algn="ctr">
+                      <a:solidFill>
+                        <a:srgbClr val="D9D9D9"/>
+                      </a:solidFill>
+                      <a:prstDash val="solid"/>
+                      <a:round/>
+                      <a:headEnd type="none" w="med" len="med"/>
+                      <a:tailEnd type="none" w="med" len="med"/>
+                    </a:lnR>
+                    <a:lnT w="6350" cap="flat" cmpd="sng" algn="ctr">
+                      <a:solidFill>
+                        <a:srgbClr val="D9D9D9"/>
+                      </a:solidFill>
+                      <a:prstDash val="solid"/>
+                      <a:round/>
+                      <a:headEnd type="none" w="med" len="med"/>
+                      <a:tailEnd type="none" w="med" len="med"/>
+                    </a:lnT>
+                    <a:lnB w="6350" cap="flat" cmpd="sng" algn="ctr">
+                      <a:solidFill>
+                        <a:srgbClr val="D9D9D9"/>
+                      </a:solidFill>
+                      <a:prstDash val="solid"/>
+                      <a:round/>
+                      <a:headEnd type="none" w="med" len="med"/>
+                      <a:tailEnd type="none" w="med" len="med"/>
+                    </a:lnB>
+                    <a:solidFill>
+                      <a:srgbClr val="0079C2"/>
+                    </a:solidFill>
+                  </a:tcPr>
+                </a:tc>
+                <a:tc>
+                  <a:txBody>
+                    <a:bodyPr/>
+                    <a:lstStyle/>
+                    <a:p>
+                      <a:pPr indent="0" marL="0">
+                        <a:buNone/>
+                      </a:pPr>
+                      <a:r>
+                        <a:rPr lang="en-US" sz="1000" b="1" dirty="0">
+                          <a:solidFill>
+                            <a:srgbClr val="FFFFFF"/>
+                          </a:solidFill>
+                          <a:latin typeface="Noto Sans JP" pitchFamily="34" charset="0"/>
+                          <a:ea typeface="Noto Sans JP" pitchFamily="34" charset="-122"/>
+                          <a:cs typeface="Noto Sans JP" pitchFamily="34" charset="-120"/>
+                        </a:rPr>
+                        <a:t>FY2022</a:t>
+                      </a:r>
+                      <a:endParaRPr lang="en-US" sz="1000" dirty="0">
+                        <a:latin typeface="Noto Sans JP" charset="0"/>
+                        <a:ea typeface="Noto Sans JP" charset="0"/>
+                        <a:cs typeface="Noto Sans JP" charset="0"/>
+                      </a:endParaRPr>
+                    </a:p>
+                  </a:txBody>
+                  <a:tcPr marL="45720" marR="45720" marT="45720" marB="45720" anchor="ctr">
+                    <a:lnL w="6350" cap="flat" cmpd="sng" algn="ctr">
+                      <a:solidFill>
+                        <a:srgbClr val="D9D9D9"/>
+                      </a:solidFill>
+                      <a:prstDash val="solid"/>
+                      <a:round/>
+                      <a:headEnd type="none" w="med" len="med"/>
+                      <a:tailEnd type="none" w="med" len="med"/>
+                    </a:lnL>
+                    <a:lnR w="6350" cap="flat" cmpd="sng" algn="ctr">
+                      <a:solidFill>
+                        <a:srgbClr val="D9D9D9"/>
+                      </a:solidFill>
+                      <a:prstDash val="solid"/>
+                      <a:round/>
+                      <a:headEnd type="none" w="med" len="med"/>
+                      <a:tailEnd type="none" w="med" len="med"/>
+                    </a:lnR>
+                    <a:lnT w="6350" cap="flat" cmpd="sng" algn="ctr">
+                      <a:solidFill>
+                        <a:srgbClr val="D9D9D9"/>
+                      </a:solidFill>
+                      <a:prstDash val="solid"/>
+                      <a:round/>
+                      <a:headEnd type="none" w="med" len="med"/>
+                      <a:tailEnd type="none" w="med" len="med"/>
+                    </a:lnT>
+                    <a:lnB w="6350" cap="flat" cmpd="sng" algn="ctr">
+                      <a:solidFill>
+                        <a:srgbClr val="D9D9D9"/>
+                      </a:solidFill>
+                      <a:prstDash val="solid"/>
+                      <a:round/>
+                      <a:headEnd type="none" w="med" len="med"/>
+                      <a:tailEnd type="none" w="med" len="med"/>
+                    </a:lnB>
+                    <a:solidFill>
+                      <a:srgbClr val="0079C2"/>
+                    </a:solidFill>
+                  </a:tcPr>
+                </a:tc>
+                <a:tc>
+                  <a:txBody>
+                    <a:bodyPr/>
+                    <a:lstStyle/>
+                    <a:p>
+                      <a:pPr indent="0" marL="0">
+                        <a:buNone/>
+                      </a:pPr>
+                      <a:r>
+                        <a:rPr lang="en-US" sz="1000" b="1" dirty="0">
+                          <a:solidFill>
+                            <a:srgbClr val="FFFFFF"/>
+                          </a:solidFill>
+                          <a:latin typeface="Noto Sans JP" pitchFamily="34" charset="0"/>
+                          <a:ea typeface="Noto Sans JP" pitchFamily="34" charset="-122"/>
+                          <a:cs typeface="Noto Sans JP" pitchFamily="34" charset="-120"/>
+                        </a:rPr>
+                        <a:t>FY2024</a:t>
+                      </a:r>
+                      <a:endParaRPr lang="en-US" sz="1000" dirty="0">
+                        <a:latin typeface="Noto Sans JP" charset="0"/>
+                        <a:ea typeface="Noto Sans JP" charset="0"/>
+                        <a:cs typeface="Noto Sans JP" charset="0"/>
+                      </a:endParaRPr>
+                    </a:p>
+                  </a:txBody>
+                  <a:tcPr marL="45720" marR="45720" marT="45720" marB="45720" anchor="ctr">
+                    <a:lnL w="6350" cap="flat" cmpd="sng" algn="ctr">
+                      <a:solidFill>
+                        <a:srgbClr val="D9D9D9"/>
+                      </a:solidFill>
+                      <a:prstDash val="solid"/>
+                      <a:round/>
+                      <a:headEnd type="none" w="med" len="med"/>
+                      <a:tailEnd type="none" w="med" len="med"/>
+                    </a:lnL>
+                    <a:lnR w="6350" cap="flat" cmpd="sng" algn="ctr">
+                      <a:solidFill>
+                        <a:srgbClr val="D9D9D9"/>
+                      </a:solidFill>
+                      <a:prstDash val="solid"/>
+                      <a:round/>
+                      <a:headEnd type="none" w="med" len="med"/>
+                      <a:tailEnd type="none" w="med" len="med"/>
+                    </a:lnR>
+                    <a:lnT w="6350" cap="flat" cmpd="sng" algn="ctr">
+                      <a:solidFill>
+                        <a:srgbClr val="D9D9D9"/>
+                      </a:solidFill>
+                      <a:prstDash val="solid"/>
+                      <a:round/>
+                      <a:headEnd type="none" w="med" len="med"/>
+                      <a:tailEnd type="none" w="med" len="med"/>
+                    </a:lnT>
+                    <a:lnB w="6350" cap="flat" cmpd="sng" algn="ctr">
+                      <a:solidFill>
+                        <a:srgbClr val="D9D9D9"/>
+                      </a:solidFill>
+                      <a:prstDash val="solid"/>
+                      <a:round/>
+                      <a:headEnd type="none" w="med" len="med"/>
+                      <a:tailEnd type="none" w="med" len="med"/>
+                    </a:lnB>
+                    <a:solidFill>
+                      <a:srgbClr val="0079C2"/>
+                    </a:solidFill>
+                  </a:tcPr>
+                </a:tc>
+                <a:tc>
+                  <a:txBody>
+                    <a:bodyPr/>
+                    <a:lstStyle/>
+                    <a:p>
+                      <a:pPr indent="0" marL="0">
+                        <a:buNone/>
+                      </a:pPr>
+                      <a:r>
+                        <a:rPr lang="en-US" sz="1000" b="1" dirty="0">
+                          <a:solidFill>
+                            <a:srgbClr val="FFFFFF"/>
+                          </a:solidFill>
+                          <a:latin typeface="Noto Sans JP" pitchFamily="34" charset="0"/>
+                          <a:ea typeface="Noto Sans JP" pitchFamily="34" charset="-122"/>
+                          <a:cs typeface="Noto Sans JP" pitchFamily="34" charset="-120"/>
+                        </a:rPr>
+                        <a:t>FY2025</a:t>
+                      </a:r>
+                      <a:endParaRPr lang="en-US" sz="1000" dirty="0">
+                        <a:latin typeface="Noto Sans JP" charset="0"/>
+                        <a:ea typeface="Noto Sans JP" charset="0"/>
+                        <a:cs typeface="Noto Sans JP" charset="0"/>
+                      </a:endParaRPr>
+                    </a:p>
+                  </a:txBody>
+                  <a:tcPr marL="45720" marR="45720" marT="45720" marB="45720" anchor="ctr">
+                    <a:lnL w="6350" cap="flat" cmpd="sng" algn="ctr">
+                      <a:solidFill>
+                        <a:srgbClr val="D9D9D9"/>
+                      </a:solidFill>
+                      <a:prstDash val="solid"/>
+                      <a:round/>
+                      <a:headEnd type="none" w="med" len="med"/>
+                      <a:tailEnd type="none" w="med" len="med"/>
+                    </a:lnL>
+                    <a:lnR w="6350" cap="flat" cmpd="sng" algn="ctr">
+                      <a:solidFill>
+                        <a:srgbClr val="D9D9D9"/>
+                      </a:solidFill>
+                      <a:prstDash val="solid"/>
+                      <a:round/>
+                      <a:headEnd type="none" w="med" len="med"/>
+                      <a:tailEnd type="none" w="med" len="med"/>
+                    </a:lnR>
+                    <a:lnT w="6350" cap="flat" cmpd="sng" algn="ctr">
+                      <a:solidFill>
+                        <a:srgbClr val="D9D9D9"/>
+                      </a:solidFill>
+                      <a:prstDash val="solid"/>
+                      <a:round/>
+                      <a:headEnd type="none" w="med" len="med"/>
+                      <a:tailEnd type="none" w="med" len="med"/>
+                    </a:lnT>
+                    <a:lnB w="6350" cap="flat" cmpd="sng" algn="ctr">
+                      <a:solidFill>
+                        <a:srgbClr val="D9D9D9"/>
+                      </a:solidFill>
+                      <a:prstDash val="solid"/>
+                      <a:round/>
+                      <a:headEnd type="none" w="med" len="med"/>
+                      <a:tailEnd type="none" w="med" len="med"/>
+                    </a:lnB>
+                    <a:solidFill>
+                      <a:srgbClr val="0079C2"/>
+                    </a:solidFill>
+                  </a:tcPr>
+                </a:tc>
+                <a:tc>
+                  <a:txBody>
+                    <a:bodyPr/>
+                    <a:lstStyle/>
+                    <a:p>
+                      <a:pPr indent="0" marL="0">
+                        <a:buNone/>
+                      </a:pPr>
+                      <a:r>
+                        <a:rPr lang="en-US" sz="1000" b="1" dirty="0">
+                          <a:solidFill>
+                            <a:srgbClr val="FFFFFF"/>
+                          </a:solidFill>
+                          <a:latin typeface="Noto Sans JP" pitchFamily="34" charset="0"/>
+                          <a:ea typeface="Noto Sans JP" pitchFamily="34" charset="-122"/>
+                          <a:cs typeface="Noto Sans JP" pitchFamily="34" charset="-120"/>
+                        </a:rPr>
+                        <a:t>FY2026(4-6月)</a:t>
+                      </a:r>
+                      <a:endParaRPr lang="en-US" sz="1000" dirty="0">
+                        <a:latin typeface="Noto Sans JP" charset="0"/>
+                        <a:ea typeface="Noto Sans JP" charset="0"/>
+                        <a:cs typeface="Noto Sans JP" charset="0"/>
+                      </a:endParaRPr>
+                    </a:p>
+                  </a:txBody>
+                  <a:tcPr marL="45720" marR="45720" marT="45720" marB="45720" anchor="ctr">
+                    <a:lnL w="6350" cap="flat" cmpd="sng" algn="ctr">
+                      <a:solidFill>
+                        <a:srgbClr val="D9D9D9"/>
+                      </a:solidFill>
+                      <a:prstDash val="solid"/>
+                      <a:round/>
+                      <a:headEnd type="none" w="med" len="med"/>
+                      <a:tailEnd type="none" w="med" len="med"/>
+                    </a:lnL>
+                    <a:lnR w="6350" cap="flat" cmpd="sng" algn="ctr">
+                      <a:solidFill>
+                        <a:srgbClr val="D9D9D9"/>
+                      </a:solidFill>
+                      <a:prstDash val="solid"/>
+                      <a:round/>
+                      <a:headEnd type="none" w="med" len="med"/>
+                      <a:tailEnd type="none" w="med" len="med"/>
+                    </a:lnR>
+                    <a:lnT w="6350" cap="flat" cmpd="sng" algn="ctr">
+                      <a:solidFill>
+                        <a:srgbClr val="D9D9D9"/>
+                      </a:solidFill>
+                      <a:prstDash val="solid"/>
+                      <a:round/>
+                      <a:headEnd type="none" w="med" len="med"/>
+                      <a:tailEnd type="none" w="med" len="med"/>
+                    </a:lnT>
+                    <a:lnB w="6350" cap="flat" cmpd="sng" algn="ctr">
+                      <a:solidFill>
+                        <a:srgbClr val="D9D9D9"/>
+                      </a:solidFill>
+                      <a:prstDash val="solid"/>
+                      <a:round/>
+                      <a:headEnd type="none" w="med" len="med"/>
+                      <a:tailEnd type="none" w="med" len="med"/>
+                    </a:lnB>
+                    <a:solidFill>
+                      <a:srgbClr val="0079C2"/>
+                    </a:solidFill>
+                  </a:tcPr>
+                </a:tc>
+              </a:tr>
+              <a:tr h="347472">
+                <a:tc>
+                  <a:txBody>
+                    <a:bodyPr/>
+                    <a:lstStyle/>
+                    <a:p>
+                      <a:pPr indent="0" marL="0">
+                        <a:buNone/>
+                      </a:pPr>
+                      <a:r>
+                        <a:rPr lang="en-US" sz="1000" dirty="0">
+                          <a:solidFill>
+                            <a:srgbClr val="262626"/>
+                          </a:solidFill>
+                          <a:latin typeface="Noto Sans JP" pitchFamily="34" charset="0"/>
+                          <a:ea typeface="Noto Sans JP" pitchFamily="34" charset="-122"/>
+                          <a:cs typeface="Noto Sans JP" pitchFamily="34" charset="-120"/>
+                        </a:rPr>
+                        <a:t>抑制率（エネルギー）</a:t>
+                      </a:r>
+                      <a:endParaRPr lang="en-US" sz="1000" dirty="0">
+                        <a:latin typeface="Noto Sans JP" charset="0"/>
+                        <a:ea typeface="Noto Sans JP" charset="0"/>
+                        <a:cs typeface="Noto Sans JP" charset="0"/>
+                      </a:endParaRPr>
+                    </a:p>
+                  </a:txBody>
+                  <a:tcPr marL="45720" marR="45720" marT="45720" marB="45720" anchor="ctr">
+                    <a:lnL w="6350" cap="flat" cmpd="sng" algn="ctr">
+                      <a:solidFill>
+                        <a:srgbClr val="D9D9D9"/>
+                      </a:solidFill>
+                      <a:prstDash val="solid"/>
+                      <a:round/>
+                      <a:headEnd type="none" w="med" len="med"/>
+                      <a:tailEnd type="none" w="med" len="med"/>
+                    </a:lnL>
+                    <a:lnR w="6350" cap="flat" cmpd="sng" algn="ctr">
+                      <a:solidFill>
+                        <a:srgbClr val="D9D9D9"/>
+                      </a:solidFill>
+                      <a:prstDash val="solid"/>
+                      <a:round/>
+                      <a:headEnd type="none" w="med" len="med"/>
+                      <a:tailEnd type="none" w="med" len="med"/>
+                    </a:lnR>
+                    <a:lnT w="6350" cap="flat" cmpd="sng" algn="ctr">
+                      <a:solidFill>
+                        <a:srgbClr val="D9D9D9"/>
+                      </a:solidFill>
+                      <a:prstDash val="solid"/>
+                      <a:round/>
+                      <a:headEnd type="none" w="med" len="med"/>
+                      <a:tailEnd type="none" w="med" len="med"/>
+                    </a:lnT>
+                    <a:lnB w="6350" cap="flat" cmpd="sng" algn="ctr">
+                      <a:solidFill>
+                        <a:srgbClr val="D9D9D9"/>
+                      </a:solidFill>
+                      <a:prstDash val="solid"/>
+                      <a:round/>
+                      <a:headEnd type="none" w="med" len="med"/>
+                      <a:tailEnd type="none" w="med" len="med"/>
+                    </a:lnB>
+                    <a:solidFill>
+                      <a:srgbClr val="FFFFFF"/>
+                    </a:solidFill>
+                  </a:tcPr>
+                </a:tc>
+                <a:tc>
+                  <a:txBody>
+                    <a:bodyPr/>
+                    <a:lstStyle/>
+                    <a:p>
+                      <a:pPr indent="0" marL="0">
+                        <a:buNone/>
+                      </a:pPr>
+                      <a:r>
+                        <a:rPr lang="en-US" sz="1000" dirty="0">
+                          <a:solidFill>
+                            <a:srgbClr val="262626"/>
+                          </a:solidFill>
+                          <a:latin typeface="Noto Sans JP" pitchFamily="34" charset="0"/>
+                          <a:ea typeface="Noto Sans JP" pitchFamily="34" charset="-122"/>
+                          <a:cs typeface="Noto Sans JP" pitchFamily="34" charset="-120"/>
+                        </a:rPr>
+                        <a:t>0.01%</a:t>
+                      </a:r>
+                      <a:endParaRPr lang="en-US" sz="1000" dirty="0">
+                        <a:latin typeface="Noto Sans JP" charset="0"/>
+                        <a:ea typeface="Noto Sans JP" charset="0"/>
+                        <a:cs typeface="Noto Sans JP" charset="0"/>
+                      </a:endParaRPr>
+                    </a:p>
+                  </a:txBody>
+                  <a:tcPr marL="45720" marR="45720" marT="45720" marB="45720" anchor="ctr">
+                    <a:lnL w="6350" cap="flat" cmpd="sng" algn="ctr">
+                      <a:solidFill>
+                        <a:srgbClr val="D9D9D9"/>
+                      </a:solidFill>
+                      <a:prstDash val="solid"/>
+                      <a:round/>
+                      <a:headEnd type="none" w="med" len="med"/>
+                      <a:tailEnd type="none" w="med" len="med"/>
+                    </a:lnL>
+                    <a:lnR w="6350" cap="flat" cmpd="sng" algn="ctr">
+                      <a:solidFill>
+                        <a:srgbClr val="D9D9D9"/>
+                      </a:solidFill>
+                      <a:prstDash val="solid"/>
+                      <a:round/>
+                      <a:headEnd type="none" w="med" len="med"/>
+                      <a:tailEnd type="none" w="med" len="med"/>
+                    </a:lnR>
+                    <a:lnT w="6350" cap="flat" cmpd="sng" algn="ctr">
+                      <a:solidFill>
+                        <a:srgbClr val="D9D9D9"/>
+                      </a:solidFill>
+                      <a:prstDash val="solid"/>
+                      <a:round/>
+                      <a:headEnd type="none" w="med" len="med"/>
+                      <a:tailEnd type="none" w="med" len="med"/>
+                    </a:lnT>
+                    <a:lnB w="6350" cap="flat" cmpd="sng" algn="ctr">
+                      <a:solidFill>
+                        <a:srgbClr val="D9D9D9"/>
+                      </a:solidFill>
+                      <a:prstDash val="solid"/>
+                      <a:round/>
+                      <a:headEnd type="none" w="med" len="med"/>
+                      <a:tailEnd type="none" w="med" len="med"/>
+                    </a:lnB>
+                    <a:solidFill>
+                      <a:srgbClr val="FFFFFF"/>
+                    </a:solidFill>
+                  </a:tcPr>
+                </a:tc>
+                <a:tc>
+                  <a:txBody>
+                    <a:bodyPr/>
+                    <a:lstStyle/>
+                    <a:p>
+                      <a:pPr indent="0" marL="0">
+                        <a:buNone/>
+                      </a:pPr>
+                      <a:r>
+                        <a:rPr lang="en-US" sz="1000" dirty="0">
+                          <a:solidFill>
+                            <a:srgbClr val="262626"/>
+                          </a:solidFill>
+                          <a:latin typeface="Noto Sans JP" pitchFamily="34" charset="0"/>
+                          <a:ea typeface="Noto Sans JP" pitchFamily="34" charset="-122"/>
+                          <a:cs typeface="Noto Sans JP" pitchFamily="34" charset="-120"/>
+                        </a:rPr>
+                        <a:t>0.04%</a:t>
+                      </a:r>
+                      <a:endParaRPr lang="en-US" sz="1000" dirty="0">
+                        <a:latin typeface="Noto Sans JP" charset="0"/>
+                        <a:ea typeface="Noto Sans JP" charset="0"/>
+                        <a:cs typeface="Noto Sans JP" charset="0"/>
+                      </a:endParaRPr>
+                    </a:p>
+                  </a:txBody>
+                  <a:tcPr marL="45720" marR="45720" marT="45720" marB="45720" anchor="ctr">
+                    <a:lnL w="6350" cap="flat" cmpd="sng" algn="ctr">
+                      <a:solidFill>
+                        <a:srgbClr val="D9D9D9"/>
+                      </a:solidFill>
+                      <a:prstDash val="solid"/>
+                      <a:round/>
+                      <a:headEnd type="none" w="med" len="med"/>
+                      <a:tailEnd type="none" w="med" len="med"/>
+                    </a:lnL>
+                    <a:lnR w="6350" cap="flat" cmpd="sng" algn="ctr">
+                      <a:solidFill>
+                        <a:srgbClr val="D9D9D9"/>
+                      </a:solidFill>
+                      <a:prstDash val="solid"/>
+                      <a:round/>
+                      <a:headEnd type="none" w="med" len="med"/>
+                      <a:tailEnd type="none" w="med" len="med"/>
+                    </a:lnR>
+                    <a:lnT w="6350" cap="flat" cmpd="sng" algn="ctr">
+                      <a:solidFill>
+                        <a:srgbClr val="D9D9D9"/>
+                      </a:solidFill>
+                      <a:prstDash val="solid"/>
+                      <a:round/>
+                      <a:headEnd type="none" w="med" len="med"/>
+                      <a:tailEnd type="none" w="med" len="med"/>
+                    </a:lnT>
+                    <a:lnB w="6350" cap="flat" cmpd="sng" algn="ctr">
+                      <a:solidFill>
+                        <a:srgbClr val="D9D9D9"/>
+                      </a:solidFill>
+                      <a:prstDash val="solid"/>
+                      <a:round/>
+                      <a:headEnd type="none" w="med" len="med"/>
+                      <a:tailEnd type="none" w="med" len="med"/>
+                    </a:lnB>
+                    <a:solidFill>
+                      <a:srgbClr val="FFFFFF"/>
+                    </a:solidFill>
+                  </a:tcPr>
+                </a:tc>
+                <a:tc>
+                  <a:txBody>
+                    <a:bodyPr/>
+                    <a:lstStyle/>
+                    <a:p>
+                      <a:pPr indent="0" marL="0">
+                        <a:buNone/>
+                      </a:pPr>
+                      <a:r>
+                        <a:rPr lang="en-US" sz="1000" dirty="0">
+                          <a:solidFill>
+                            <a:srgbClr val="262626"/>
+                          </a:solidFill>
+                          <a:latin typeface="Noto Sans JP" pitchFamily="34" charset="0"/>
+                          <a:ea typeface="Noto Sans JP" pitchFamily="34" charset="-122"/>
+                          <a:cs typeface="Noto Sans JP" pitchFamily="34" charset="-120"/>
+                        </a:rPr>
+                        <a:t>0.10%</a:t>
+                      </a:r>
+                      <a:endParaRPr lang="en-US" sz="1000" dirty="0">
+                        <a:latin typeface="Noto Sans JP" charset="0"/>
+                        <a:ea typeface="Noto Sans JP" charset="0"/>
+                        <a:cs typeface="Noto Sans JP" charset="0"/>
+                      </a:endParaRPr>
+                    </a:p>
+                  </a:txBody>
+                  <a:tcPr marL="45720" marR="45720" marT="45720" marB="45720" anchor="ctr">
+                    <a:lnL w="6350" cap="flat" cmpd="sng" algn="ctr">
+                      <a:solidFill>
+                        <a:srgbClr val="D9D9D9"/>
+                      </a:solidFill>
+                      <a:prstDash val="solid"/>
+                      <a:round/>
+                      <a:headEnd type="none" w="med" len="med"/>
+                      <a:tailEnd type="none" w="med" len="med"/>
+                    </a:lnL>
+                    <a:lnR w="6350" cap="flat" cmpd="sng" algn="ctr">
+                      <a:solidFill>
+                        <a:srgbClr val="D9D9D9"/>
+                      </a:solidFill>
+                      <a:prstDash val="solid"/>
+                      <a:round/>
+                      <a:headEnd type="none" w="med" len="med"/>
+                      <a:tailEnd type="none" w="med" len="med"/>
+                    </a:lnR>
+                    <a:lnT w="6350" cap="flat" cmpd="sng" algn="ctr">
+                      <a:solidFill>
+                        <a:srgbClr val="D9D9D9"/>
+                      </a:solidFill>
+                      <a:prstDash val="solid"/>
+                      <a:round/>
+                      <a:headEnd type="none" w="med" len="med"/>
+                      <a:tailEnd type="none" w="med" len="med"/>
+                    </a:lnT>
+                    <a:lnB w="6350" cap="flat" cmpd="sng" algn="ctr">
+                      <a:solidFill>
+                        <a:srgbClr val="D9D9D9"/>
+                      </a:solidFill>
+                      <a:prstDash val="solid"/>
+                      <a:round/>
+                      <a:headEnd type="none" w="med" len="med"/>
+                      <a:tailEnd type="none" w="med" len="med"/>
+                    </a:lnB>
+                    <a:solidFill>
+                      <a:srgbClr val="FFFFFF"/>
+                    </a:solidFill>
+                  </a:tcPr>
+                </a:tc>
+                <a:tc>
+                  <a:txBody>
+                    <a:bodyPr/>
+                    <a:lstStyle/>
+                    <a:p>
+                      <a:pPr indent="0" marL="0">
+                        <a:buNone/>
+                      </a:pPr>
+                      <a:r>
+                        <a:rPr lang="en-US" sz="1000" b="1" dirty="0">
+                          <a:solidFill>
+                            <a:srgbClr val="D95B20"/>
+                          </a:solidFill>
+                          <a:latin typeface="Noto Sans JP" pitchFamily="34" charset="0"/>
+                          <a:ea typeface="Noto Sans JP" pitchFamily="34" charset="-122"/>
+                          <a:cs typeface="Noto Sans JP" pitchFamily="34" charset="-120"/>
+                        </a:rPr>
+                        <a:t>1.35%</a:t>
+                      </a:r>
+                      <a:endParaRPr lang="en-US" sz="1000" dirty="0">
+                        <a:latin typeface="Noto Sans JP" charset="0"/>
+                        <a:ea typeface="Noto Sans JP" charset="0"/>
+                        <a:cs typeface="Noto Sans JP" charset="0"/>
+                      </a:endParaRPr>
+                    </a:p>
+                  </a:txBody>
+                  <a:tcPr marL="45720" marR="45720" marT="45720" marB="45720" anchor="ctr">
+                    <a:lnL w="6350" cap="flat" cmpd="sng" algn="ctr">
+                      <a:solidFill>
+                        <a:srgbClr val="D9D9D9"/>
+                      </a:solidFill>
+                      <a:prstDash val="solid"/>
+                      <a:round/>
+                      <a:headEnd type="none" w="med" len="med"/>
+                      <a:tailEnd type="none" w="med" len="med"/>
+                    </a:lnL>
+                    <a:lnR w="6350" cap="flat" cmpd="sng" algn="ctr">
+                      <a:solidFill>
+                        <a:srgbClr val="D9D9D9"/>
+                      </a:solidFill>
+                      <a:prstDash val="solid"/>
+                      <a:round/>
+                      <a:headEnd type="none" w="med" len="med"/>
+                      <a:tailEnd type="none" w="med" len="med"/>
+                    </a:lnR>
+                    <a:lnT w="6350" cap="flat" cmpd="sng" algn="ctr">
+                      <a:solidFill>
+                        <a:srgbClr val="D9D9D9"/>
+                      </a:solidFill>
+                      <a:prstDash val="solid"/>
+                      <a:round/>
+                      <a:headEnd type="none" w="med" len="med"/>
+                      <a:tailEnd type="none" w="med" len="med"/>
+                    </a:lnT>
+                    <a:lnB w="6350" cap="flat" cmpd="sng" algn="ctr">
+                      <a:solidFill>
+                        <a:srgbClr val="D9D9D9"/>
+                      </a:solidFill>
+                      <a:prstDash val="solid"/>
+                      <a:round/>
+                      <a:headEnd type="none" w="med" len="med"/>
+                      <a:tailEnd type="none" w="med" len="med"/>
+                    </a:lnB>
+                    <a:solidFill>
+                      <a:srgbClr val="FFFFFF"/>
+                    </a:solidFill>
+                  </a:tcPr>
+                </a:tc>
+              </a:tr>
+              <a:tr h="347472">
+                <a:tc>
+                  <a:txBody>
+                    <a:bodyPr/>
+                    <a:lstStyle/>
+                    <a:p>
+                      <a:pPr indent="0" marL="0">
+                        <a:buNone/>
+                      </a:pPr>
+                      <a:r>
+                        <a:rPr lang="en-US" sz="1000" dirty="0">
+                          <a:solidFill>
+                            <a:srgbClr val="262626"/>
+                          </a:solidFill>
+                          <a:latin typeface="Noto Sans JP" pitchFamily="34" charset="0"/>
+                          <a:ea typeface="Noto Sans JP" pitchFamily="34" charset="-122"/>
+                          <a:cs typeface="Noto Sans JP" pitchFamily="34" charset="-120"/>
+                        </a:rPr>
+                        <a:t>抑制時間</a:t>
+                      </a:r>
+                      <a:endParaRPr lang="en-US" sz="1000" dirty="0">
+                        <a:latin typeface="Noto Sans JP" charset="0"/>
+                        <a:ea typeface="Noto Sans JP" charset="0"/>
+                        <a:cs typeface="Noto Sans JP" charset="0"/>
+                      </a:endParaRPr>
+                    </a:p>
+                  </a:txBody>
+                  <a:tcPr marL="45720" marR="45720" marT="45720" marB="45720" anchor="ctr">
+                    <a:lnL w="6350" cap="flat" cmpd="sng" algn="ctr">
+                      <a:solidFill>
+                        <a:srgbClr val="D9D9D9"/>
+                      </a:solidFill>
+                      <a:prstDash val="solid"/>
+                      <a:round/>
+                      <a:headEnd type="none" w="med" len="med"/>
+                      <a:tailEnd type="none" w="med" len="med"/>
+                    </a:lnL>
+                    <a:lnR w="6350" cap="flat" cmpd="sng" algn="ctr">
+                      <a:solidFill>
+                        <a:srgbClr val="D9D9D9"/>
+                      </a:solidFill>
+                      <a:prstDash val="solid"/>
+                      <a:round/>
+                      <a:headEnd type="none" w="med" len="med"/>
+                      <a:tailEnd type="none" w="med" len="med"/>
+                    </a:lnR>
+                    <a:lnT w="6350" cap="flat" cmpd="sng" algn="ctr">
+                      <a:solidFill>
+                        <a:srgbClr val="D9D9D9"/>
+                      </a:solidFill>
+                      <a:prstDash val="solid"/>
+                      <a:round/>
+                      <a:headEnd type="none" w="med" len="med"/>
+                      <a:tailEnd type="none" w="med" len="med"/>
+                    </a:lnT>
+                    <a:lnB w="6350" cap="flat" cmpd="sng" algn="ctr">
+                      <a:solidFill>
+                        <a:srgbClr val="D9D9D9"/>
+                      </a:solidFill>
+                      <a:prstDash val="solid"/>
+                      <a:round/>
+                      <a:headEnd type="none" w="med" len="med"/>
+                      <a:tailEnd type="none" w="med" len="med"/>
+                    </a:lnB>
+                    <a:solidFill>
+                      <a:srgbClr val="F0F6FB"/>
+                    </a:solidFill>
+                  </a:tcPr>
+                </a:tc>
+                <a:tc>
+                  <a:txBody>
+                    <a:bodyPr/>
+                    <a:lstStyle/>
+                    <a:p>
+                      <a:pPr indent="0" marL="0">
+                        <a:buNone/>
+                      </a:pPr>
+                      <a:r>
+                        <a:rPr lang="en-US" sz="1000" dirty="0">
+                          <a:solidFill>
+                            <a:srgbClr val="262626"/>
+                          </a:solidFill>
+                          <a:latin typeface="Noto Sans JP" pitchFamily="34" charset="0"/>
+                          <a:ea typeface="Noto Sans JP" pitchFamily="34" charset="-122"/>
+                          <a:cs typeface="Noto Sans JP" pitchFamily="34" charset="-120"/>
+                        </a:rPr>
+                        <a:t>12h</a:t>
+                      </a:r>
+                      <a:endParaRPr lang="en-US" sz="1000" dirty="0">
+                        <a:latin typeface="Noto Sans JP" charset="0"/>
+                        <a:ea typeface="Noto Sans JP" charset="0"/>
+                        <a:cs typeface="Noto Sans JP" charset="0"/>
+                      </a:endParaRPr>
+                    </a:p>
+                  </a:txBody>
+                  <a:tcPr marL="45720" marR="45720" marT="45720" marB="45720" anchor="ctr">
+                    <a:lnL w="6350" cap="flat" cmpd="sng" algn="ctr">
+                      <a:solidFill>
+                        <a:srgbClr val="D9D9D9"/>
+                      </a:solidFill>
+                      <a:prstDash val="solid"/>
+                      <a:round/>
+                      <a:headEnd type="none" w="med" len="med"/>
+                      <a:tailEnd type="none" w="med" len="med"/>
+                    </a:lnL>
+                    <a:lnR w="6350" cap="flat" cmpd="sng" algn="ctr">
+                      <a:solidFill>
+                        <a:srgbClr val="D9D9D9"/>
+                      </a:solidFill>
+                      <a:prstDash val="solid"/>
+                      <a:round/>
+                      <a:headEnd type="none" w="med" len="med"/>
+                      <a:tailEnd type="none" w="med" len="med"/>
+                    </a:lnR>
+                    <a:lnT w="6350" cap="flat" cmpd="sng" algn="ctr">
+                      <a:solidFill>
+                        <a:srgbClr val="D9D9D9"/>
+                      </a:solidFill>
+                      <a:prstDash val="solid"/>
+                      <a:round/>
+                      <a:headEnd type="none" w="med" len="med"/>
+                      <a:tailEnd type="none" w="med" len="med"/>
+                    </a:lnT>
+                    <a:lnB w="6350" cap="flat" cmpd="sng" algn="ctr">
+                      <a:solidFill>
+                        <a:srgbClr val="D9D9D9"/>
+                      </a:solidFill>
+                      <a:prstDash val="solid"/>
+                      <a:round/>
+                      <a:headEnd type="none" w="med" len="med"/>
+                      <a:tailEnd type="none" w="med" len="med"/>
+                    </a:lnB>
+                    <a:solidFill>
+                      <a:srgbClr val="F0F6FB"/>
+                    </a:solidFill>
+                  </a:tcPr>
+                </a:tc>
+                <a:tc>
+                  <a:txBody>
+                    <a:bodyPr/>
+                    <a:lstStyle/>
+                    <a:p>
+                      <a:pPr indent="0" marL="0">
+                        <a:buNone/>
+                      </a:pPr>
+                      <a:r>
+                        <a:rPr lang="en-US" sz="1000" dirty="0">
+                          <a:solidFill>
+                            <a:srgbClr val="262626"/>
+                          </a:solidFill>
+                          <a:latin typeface="Noto Sans JP" pitchFamily="34" charset="0"/>
+                          <a:ea typeface="Noto Sans JP" pitchFamily="34" charset="-122"/>
+                          <a:cs typeface="Noto Sans JP" pitchFamily="34" charset="-120"/>
+                        </a:rPr>
+                        <a:t>12h</a:t>
+                      </a:r>
+                      <a:endParaRPr lang="en-US" sz="1000" dirty="0">
+                        <a:latin typeface="Noto Sans JP" charset="0"/>
+                        <a:ea typeface="Noto Sans JP" charset="0"/>
+                        <a:cs typeface="Noto Sans JP" charset="0"/>
+                      </a:endParaRPr>
+                    </a:p>
+                  </a:txBody>
+                  <a:tcPr marL="45720" marR="45720" marT="45720" marB="45720" anchor="ctr">
+                    <a:lnL w="6350" cap="flat" cmpd="sng" algn="ctr">
+                      <a:solidFill>
+                        <a:srgbClr val="D9D9D9"/>
+                      </a:solidFill>
+                      <a:prstDash val="solid"/>
+                      <a:round/>
+                      <a:headEnd type="none" w="med" len="med"/>
+                      <a:tailEnd type="none" w="med" len="med"/>
+                    </a:lnL>
+                    <a:lnR w="6350" cap="flat" cmpd="sng" algn="ctr">
+                      <a:solidFill>
+                        <a:srgbClr val="D9D9D9"/>
+                      </a:solidFill>
+                      <a:prstDash val="solid"/>
+                      <a:round/>
+                      <a:headEnd type="none" w="med" len="med"/>
+                      <a:tailEnd type="none" w="med" len="med"/>
+                    </a:lnR>
+                    <a:lnT w="6350" cap="flat" cmpd="sng" algn="ctr">
+                      <a:solidFill>
+                        <a:srgbClr val="D9D9D9"/>
+                      </a:solidFill>
+                      <a:prstDash val="solid"/>
+                      <a:round/>
+                      <a:headEnd type="none" w="med" len="med"/>
+                      <a:tailEnd type="none" w="med" len="med"/>
+                    </a:lnT>
+                    <a:lnB w="6350" cap="flat" cmpd="sng" algn="ctr">
+                      <a:solidFill>
+                        <a:srgbClr val="D9D9D9"/>
+                      </a:solidFill>
+                      <a:prstDash val="solid"/>
+                      <a:round/>
+                      <a:headEnd type="none" w="med" len="med"/>
+                      <a:tailEnd type="none" w="med" len="med"/>
+                    </a:lnB>
+                    <a:solidFill>
+                      <a:srgbClr val="F0F6FB"/>
+                    </a:solidFill>
+                  </a:tcPr>
+                </a:tc>
+                <a:tc>
+                  <a:txBody>
+                    <a:bodyPr/>
+                    <a:lstStyle/>
+                    <a:p>
+                      <a:pPr indent="0" marL="0">
+                        <a:buNone/>
+                      </a:pPr>
+                      <a:r>
+                        <a:rPr lang="en-US" sz="1000" dirty="0">
+                          <a:solidFill>
+                            <a:srgbClr val="262626"/>
+                          </a:solidFill>
+                          <a:latin typeface="Noto Sans JP" pitchFamily="34" charset="0"/>
+                          <a:ea typeface="Noto Sans JP" pitchFamily="34" charset="-122"/>
+                          <a:cs typeface="Noto Sans JP" pitchFamily="34" charset="-120"/>
+                        </a:rPr>
+                        <a:t>109h</a:t>
+                      </a:r>
+                      <a:endParaRPr lang="en-US" sz="1000" dirty="0">
+                        <a:latin typeface="Noto Sans JP" charset="0"/>
+                        <a:ea typeface="Noto Sans JP" charset="0"/>
+                        <a:cs typeface="Noto Sans JP" charset="0"/>
+                      </a:endParaRPr>
+                    </a:p>
+                  </a:txBody>
+                  <a:tcPr marL="45720" marR="45720" marT="45720" marB="45720" anchor="ctr">
+                    <a:lnL w="6350" cap="flat" cmpd="sng" algn="ctr">
+                      <a:solidFill>
+                        <a:srgbClr val="D9D9D9"/>
+                      </a:solidFill>
+                      <a:prstDash val="solid"/>
+                      <a:round/>
+                      <a:headEnd type="none" w="med" len="med"/>
+                      <a:tailEnd type="none" w="med" len="med"/>
+                    </a:lnL>
+                    <a:lnR w="6350" cap="flat" cmpd="sng" algn="ctr">
+                      <a:solidFill>
+                        <a:srgbClr val="D9D9D9"/>
+                      </a:solidFill>
+                      <a:prstDash val="solid"/>
+                      <a:round/>
+                      <a:headEnd type="none" w="med" len="med"/>
+                      <a:tailEnd type="none" w="med" len="med"/>
+                    </a:lnR>
+                    <a:lnT w="6350" cap="flat" cmpd="sng" algn="ctr">
+                      <a:solidFill>
+                        <a:srgbClr val="D9D9D9"/>
+                      </a:solidFill>
+                      <a:prstDash val="solid"/>
+                      <a:round/>
+                      <a:headEnd type="none" w="med" len="med"/>
+                      <a:tailEnd type="none" w="med" len="med"/>
+                    </a:lnT>
+                    <a:lnB w="6350" cap="flat" cmpd="sng" algn="ctr">
+                      <a:solidFill>
+                        <a:srgbClr val="D9D9D9"/>
+                      </a:solidFill>
+                      <a:prstDash val="solid"/>
+                      <a:round/>
+                      <a:headEnd type="none" w="med" len="med"/>
+                      <a:tailEnd type="none" w="med" len="med"/>
+                    </a:lnB>
+                    <a:solidFill>
+                      <a:srgbClr val="F0F6FB"/>
+                    </a:solidFill>
+                  </a:tcPr>
+                </a:tc>
+                <a:tc>
+                  <a:txBody>
+                    <a:bodyPr/>
+                    <a:lstStyle/>
+                    <a:p>
+                      <a:pPr indent="0" marL="0">
+                        <a:buNone/>
+                      </a:pPr>
+                      <a:r>
+                        <a:rPr lang="en-US" sz="1000" b="1" dirty="0">
+                          <a:solidFill>
+                            <a:srgbClr val="262626"/>
+                          </a:solidFill>
+                          <a:latin typeface="Noto Sans JP" pitchFamily="34" charset="0"/>
+                          <a:ea typeface="Noto Sans JP" pitchFamily="34" charset="-122"/>
+                          <a:cs typeface="Noto Sans JP" pitchFamily="34" charset="-120"/>
+                        </a:rPr>
+                        <a:t>235h</a:t>
+                      </a:r>
+                      <a:endParaRPr lang="en-US" sz="1000" dirty="0">
+                        <a:latin typeface="Noto Sans JP" charset="0"/>
+                        <a:ea typeface="Noto Sans JP" charset="0"/>
+                        <a:cs typeface="Noto Sans JP" charset="0"/>
+                      </a:endParaRPr>
+                    </a:p>
+                  </a:txBody>
+                  <a:tcPr marL="45720" marR="45720" marT="45720" marB="45720" anchor="ctr">
+                    <a:lnL w="6350" cap="flat" cmpd="sng" algn="ctr">
+                      <a:solidFill>
+                        <a:srgbClr val="D9D9D9"/>
+                      </a:solidFill>
+                      <a:prstDash val="solid"/>
+                      <a:round/>
+                      <a:headEnd type="none" w="med" len="med"/>
+                      <a:tailEnd type="none" w="med" len="med"/>
+                    </a:lnL>
+                    <a:lnR w="6350" cap="flat" cmpd="sng" algn="ctr">
+                      <a:solidFill>
+                        <a:srgbClr val="D9D9D9"/>
+                      </a:solidFill>
+                      <a:prstDash val="solid"/>
+                      <a:round/>
+                      <a:headEnd type="none" w="med" len="med"/>
+                      <a:tailEnd type="none" w="med" len="med"/>
+                    </a:lnR>
+                    <a:lnT w="6350" cap="flat" cmpd="sng" algn="ctr">
+                      <a:solidFill>
+                        <a:srgbClr val="D9D9D9"/>
+                      </a:solidFill>
+                      <a:prstDash val="solid"/>
+                      <a:round/>
+                      <a:headEnd type="none" w="med" len="med"/>
+                      <a:tailEnd type="none" w="med" len="med"/>
+                    </a:lnT>
+                    <a:lnB w="6350" cap="flat" cmpd="sng" algn="ctr">
+                      <a:solidFill>
+                        <a:srgbClr val="D9D9D9"/>
+                      </a:solidFill>
+                      <a:prstDash val="solid"/>
+                      <a:round/>
+                      <a:headEnd type="none" w="med" len="med"/>
+                      <a:tailEnd type="none" w="med" len="med"/>
+                    </a:lnB>
+                    <a:solidFill>
+                      <a:srgbClr val="F0F6FB"/>
+                    </a:solidFill>
+                  </a:tcPr>
+                </a:tc>
+              </a:tr>
+            </a:tbl>
+          </a:graphicData>
+        </a:graphic>
+      </p:graphicFrame>
+      <p:sp>
+        <p:nvSpPr>
+          <p:cNvPr id="9" name="Shape 6"/>
+          <p:cNvSpPr/>
+          <p:nvPr/>
+        </p:nvSpPr>
+        <p:spPr>
+          <a:xfrm>
+            <a:off x="548640" y="2990088"/>
+            <a:ext cx="45720" cy="274320"/>
+          </a:xfrm>
+          <a:prstGeom prst="rect">
+            <a:avLst/>
+          </a:prstGeom>
+          <a:solidFill>
+            <a:srgbClr val="0079C2"/>
+          </a:solidFill>
+          <a:ln/>
+        </p:spPr>
+      </p:sp>
+      <p:sp>
+        <p:nvSpPr>
+          <p:cNvPr id="10" name="Text 7"/>
+          <p:cNvSpPr/>
+          <p:nvPr/>
+        </p:nvSpPr>
+        <p:spPr>
+          <a:xfrm>
+            <a:off x="676656" y="2971800"/>
+            <a:ext cx="5760720" cy="310896"/>
+          </a:xfrm>
+          <a:prstGeom prst="rect">
+            <a:avLst/>
+          </a:prstGeom>
+          <a:noFill/>
+          <a:ln/>
+        </p:spPr>
+        <p:txBody>
+          <a:bodyPr wrap="square" lIns="0" tIns="0" rIns="0" bIns="0" rtlCol="0" anchor="ctr"/>
+          <a:lstStyle/>
+          <a:p>
+            <a:pPr indent="0" marL="0">
+              <a:buNone/>
+            </a:pPr>
+            <a:r>
+              <a:rPr lang="en-US" sz="1300" b="1" dirty="0">
+                <a:solidFill>
+                  <a:srgbClr val="000000"/>
+                </a:solidFill>
+                <a:latin typeface="Noto Sans JP SemiBold" pitchFamily="34" charset="0"/>
+                <a:ea typeface="Noto Sans JP SemiBold" pitchFamily="34" charset="-122"/>
+                <a:cs typeface="Noto Sans JP SemiBold" pitchFamily="34" charset="-120"/>
+              </a:rPr>
+              <a:t>根拠② 抑制発生時間のエリア価格内訳</a:t>
+            </a:r>
+            <a:endParaRPr lang="en-US" sz="1300" dirty="0"/>
+          </a:p>
+        </p:txBody>
+      </p:sp>
+      <p:graphicFrame>
+        <p:nvGraphicFramePr>
+          <p:cNvPr id="23" name="Table 1"/>
+          <p:cNvGraphicFramePr>
+            <a:graphicFrameLocks noGrp="1"/>
+          </p:cNvGraphicFramePr>
+          <p:nvPr>
+            <p:extLst>
+              <p:ext uri="{D42A27DB-BD31-4B8C-83A1-F6EECF244321}">
+                <p14:modId xmlns:p14="http://schemas.microsoft.com/office/powerpoint/2010/main" val="1579011935"/>
+              </p:ext>
+            </p:extLst>
+          </p:nvPr>
+        </p:nvGraphicFramePr>
+        <p:xfrm>
+          <a:off x="548640" y="3337560"/>
+          <a:ext cx="5852160" cy="914400"/>
+        </p:xfrm>
+        <a:graphic>
+          <a:graphicData uri="http://schemas.openxmlformats.org/drawingml/2006/table">
+            <a:tbl>
+              <a:tblPr/>
+              <a:tblGrid>
+                <a:gridCol w="1463040"/>
+                <a:gridCol w="1463040"/>
+                <a:gridCol w="1463040"/>
+                <a:gridCol w="1463040"/>
+              </a:tblGrid>
+              <a:tr h="347472">
+                <a:tc>
+                  <a:txBody>
+                    <a:bodyPr/>
+                    <a:lstStyle/>
+                    <a:p>
+                      <a:pPr indent="0" marL="0">
+                        <a:buNone/>
+                      </a:pPr>
+                      <a:endParaRPr lang="en-US" sz="1000" dirty="0">
+                        <a:latin typeface="Noto Sans JP" charset="0"/>
+                        <a:ea typeface="Noto Sans JP" charset="0"/>
+                        <a:cs typeface="Noto Sans JP" charset="0"/>
+                      </a:endParaRPr>
+                    </a:p>
+                  </a:txBody>
+                  <a:tcPr marL="45720" marR="45720" marT="45720" marB="45720" anchor="ctr">
+                    <a:lnL w="6350" cap="flat" cmpd="sng" algn="ctr">
+                      <a:solidFill>
+                        <a:srgbClr val="D9D9D9"/>
+                      </a:solidFill>
+                      <a:prstDash val="solid"/>
+                      <a:round/>
+                      <a:headEnd type="none" w="med" len="med"/>
+                      <a:tailEnd type="none" w="med" len="med"/>
+                    </a:lnL>
+                    <a:lnR w="6350" cap="flat" cmpd="sng" algn="ctr">
+                      <a:solidFill>
+                        <a:srgbClr val="D9D9D9"/>
+                      </a:solidFill>
+                      <a:prstDash val="solid"/>
+                      <a:round/>
+                      <a:headEnd type="none" w="med" len="med"/>
+                      <a:tailEnd type="none" w="med" len="med"/>
+                    </a:lnR>
+                    <a:lnT w="6350" cap="flat" cmpd="sng" algn="ctr">
+                      <a:solidFill>
+                        <a:srgbClr val="D9D9D9"/>
+                      </a:solidFill>
+                      <a:prstDash val="solid"/>
+                      <a:round/>
+                      <a:headEnd type="none" w="med" len="med"/>
+                      <a:tailEnd type="none" w="med" len="med"/>
+                    </a:lnT>
+                    <a:lnB w="6350" cap="flat" cmpd="sng" algn="ctr">
+                      <a:solidFill>
+                        <a:srgbClr val="D9D9D9"/>
+                      </a:solidFill>
+                      <a:prstDash val="solid"/>
+                      <a:round/>
+                      <a:headEnd type="none" w="med" len="med"/>
+                      <a:tailEnd type="none" w="med" len="med"/>
+                    </a:lnB>
+                    <a:solidFill>
+                      <a:srgbClr val="0079C2"/>
+                    </a:solidFill>
+                  </a:tcPr>
+                </a:tc>
+                <a:tc>
+                  <a:txBody>
+                    <a:bodyPr/>
+                    <a:lstStyle/>
+                    <a:p>
+                      <a:pPr indent="0" marL="0">
+                        <a:buNone/>
+                      </a:pPr>
+                      <a:r>
+                        <a:rPr lang="en-US" sz="1000" b="1" dirty="0">
+                          <a:solidFill>
+                            <a:srgbClr val="FFFFFF"/>
+                          </a:solidFill>
+                          <a:latin typeface="Noto Sans JP" pitchFamily="34" charset="0"/>
+                          <a:ea typeface="Noto Sans JP" pitchFamily="34" charset="-122"/>
+                          <a:cs typeface="Noto Sans JP" pitchFamily="34" charset="-120"/>
+                        </a:rPr>
+                        <a:t>床（0.01円）</a:t>
+                      </a:r>
+                      <a:endParaRPr lang="en-US" sz="1000" dirty="0">
+                        <a:latin typeface="Noto Sans JP" charset="0"/>
+                        <a:ea typeface="Noto Sans JP" charset="0"/>
+                        <a:cs typeface="Noto Sans JP" charset="0"/>
+                      </a:endParaRPr>
+                    </a:p>
+                  </a:txBody>
+                  <a:tcPr marL="45720" marR="45720" marT="45720" marB="45720" anchor="ctr">
+                    <a:lnL w="6350" cap="flat" cmpd="sng" algn="ctr">
+                      <a:solidFill>
+                        <a:srgbClr val="D9D9D9"/>
+                      </a:solidFill>
+                      <a:prstDash val="solid"/>
+                      <a:round/>
+                      <a:headEnd type="none" w="med" len="med"/>
+                      <a:tailEnd type="none" w="med" len="med"/>
+                    </a:lnL>
+                    <a:lnR w="6350" cap="flat" cmpd="sng" algn="ctr">
+                      <a:solidFill>
+                        <a:srgbClr val="D9D9D9"/>
+                      </a:solidFill>
+                      <a:prstDash val="solid"/>
+                      <a:round/>
+                      <a:headEnd type="none" w="med" len="med"/>
+                      <a:tailEnd type="none" w="med" len="med"/>
+                    </a:lnR>
+                    <a:lnT w="6350" cap="flat" cmpd="sng" algn="ctr">
+                      <a:solidFill>
+                        <a:srgbClr val="D9D9D9"/>
+                      </a:solidFill>
+                      <a:prstDash val="solid"/>
+                      <a:round/>
+                      <a:headEnd type="none" w="med" len="med"/>
+                      <a:tailEnd type="none" w="med" len="med"/>
+                    </a:lnT>
+                    <a:lnB w="6350" cap="flat" cmpd="sng" algn="ctr">
+                      <a:solidFill>
+                        <a:srgbClr val="D9D9D9"/>
+                      </a:solidFill>
+                      <a:prstDash val="solid"/>
+                      <a:round/>
+                      <a:headEnd type="none" w="med" len="med"/>
+                      <a:tailEnd type="none" w="med" len="med"/>
+                    </a:lnB>
+                    <a:solidFill>
+                      <a:srgbClr val="0079C2"/>
+                    </a:solidFill>
+                  </a:tcPr>
+                </a:tc>
+                <a:tc>
+                  <a:txBody>
+                    <a:bodyPr/>
+                    <a:lstStyle/>
+                    <a:p>
+                      <a:pPr indent="0" marL="0">
+                        <a:buNone/>
+                      </a:pPr>
+                      <a:r>
+                        <a:rPr lang="en-US" sz="1000" b="1" dirty="0">
+                          <a:solidFill>
+                            <a:srgbClr val="FFFFFF"/>
+                          </a:solidFill>
+                          <a:latin typeface="Noto Sans JP" pitchFamily="34" charset="0"/>
+                          <a:ea typeface="Noto Sans JP" pitchFamily="34" charset="-122"/>
+                          <a:cs typeface="Noto Sans JP" pitchFamily="34" charset="-120"/>
+                        </a:rPr>
+                        <a:t>0.01〜5円</a:t>
+                      </a:r>
+                      <a:endParaRPr lang="en-US" sz="1000" dirty="0">
+                        <a:latin typeface="Noto Sans JP" charset="0"/>
+                        <a:ea typeface="Noto Sans JP" charset="0"/>
+                        <a:cs typeface="Noto Sans JP" charset="0"/>
+                      </a:endParaRPr>
+                    </a:p>
+                  </a:txBody>
+                  <a:tcPr marL="45720" marR="45720" marT="45720" marB="45720" anchor="ctr">
+                    <a:lnL w="6350" cap="flat" cmpd="sng" algn="ctr">
+                      <a:solidFill>
+                        <a:srgbClr val="D9D9D9"/>
+                      </a:solidFill>
+                      <a:prstDash val="solid"/>
+                      <a:round/>
+                      <a:headEnd type="none" w="med" len="med"/>
+                      <a:tailEnd type="none" w="med" len="med"/>
+                    </a:lnL>
+                    <a:lnR w="6350" cap="flat" cmpd="sng" algn="ctr">
+                      <a:solidFill>
+                        <a:srgbClr val="D9D9D9"/>
+                      </a:solidFill>
+                      <a:prstDash val="solid"/>
+                      <a:round/>
+                      <a:headEnd type="none" w="med" len="med"/>
+                      <a:tailEnd type="none" w="med" len="med"/>
+                    </a:lnR>
+                    <a:lnT w="6350" cap="flat" cmpd="sng" algn="ctr">
+                      <a:solidFill>
+                        <a:srgbClr val="D9D9D9"/>
+                      </a:solidFill>
+                      <a:prstDash val="solid"/>
+                      <a:round/>
+                      <a:headEnd type="none" w="med" len="med"/>
+                      <a:tailEnd type="none" w="med" len="med"/>
+                    </a:lnT>
+                    <a:lnB w="6350" cap="flat" cmpd="sng" algn="ctr">
+                      <a:solidFill>
+                        <a:srgbClr val="D9D9D9"/>
+                      </a:solidFill>
+                      <a:prstDash val="solid"/>
+                      <a:round/>
+                      <a:headEnd type="none" w="med" len="med"/>
+                      <a:tailEnd type="none" w="med" len="med"/>
+                    </a:lnB>
+                    <a:solidFill>
+                      <a:srgbClr val="0079C2"/>
+                    </a:solidFill>
+                  </a:tcPr>
+                </a:tc>
+                <a:tc>
+                  <a:txBody>
+                    <a:bodyPr/>
+                    <a:lstStyle/>
+                    <a:p>
+                      <a:pPr indent="0" marL="0">
+                        <a:buNone/>
+                      </a:pPr>
+                      <a:r>
+                        <a:rPr lang="en-US" sz="1000" b="1" dirty="0">
+                          <a:solidFill>
+                            <a:srgbClr val="FFFFFF"/>
+                          </a:solidFill>
+                          <a:latin typeface="Noto Sans JP" pitchFamily="34" charset="0"/>
+                          <a:ea typeface="Noto Sans JP" pitchFamily="34" charset="-122"/>
+                          <a:cs typeface="Noto Sans JP" pitchFamily="34" charset="-120"/>
+                        </a:rPr>
+                        <a:t>5円超</a:t>
+                      </a:r>
+                      <a:endParaRPr lang="en-US" sz="1000" dirty="0">
+                        <a:latin typeface="Noto Sans JP" charset="0"/>
+                        <a:ea typeface="Noto Sans JP" charset="0"/>
+                        <a:cs typeface="Noto Sans JP" charset="0"/>
+                      </a:endParaRPr>
+                    </a:p>
+                  </a:txBody>
+                  <a:tcPr marL="45720" marR="45720" marT="45720" marB="45720" anchor="ctr">
+                    <a:lnL w="6350" cap="flat" cmpd="sng" algn="ctr">
+                      <a:solidFill>
+                        <a:srgbClr val="D9D9D9"/>
+                      </a:solidFill>
+                      <a:prstDash val="solid"/>
+                      <a:round/>
+                      <a:headEnd type="none" w="med" len="med"/>
+                      <a:tailEnd type="none" w="med" len="med"/>
+                    </a:lnL>
+                    <a:lnR w="6350" cap="flat" cmpd="sng" algn="ctr">
+                      <a:solidFill>
+                        <a:srgbClr val="D9D9D9"/>
+                      </a:solidFill>
+                      <a:prstDash val="solid"/>
+                      <a:round/>
+                      <a:headEnd type="none" w="med" len="med"/>
+                      <a:tailEnd type="none" w="med" len="med"/>
+                    </a:lnR>
+                    <a:lnT w="6350" cap="flat" cmpd="sng" algn="ctr">
+                      <a:solidFill>
+                        <a:srgbClr val="D9D9D9"/>
+                      </a:solidFill>
+                      <a:prstDash val="solid"/>
+                      <a:round/>
+                      <a:headEnd type="none" w="med" len="med"/>
+                      <a:tailEnd type="none" w="med" len="med"/>
+                    </a:lnT>
+                    <a:lnB w="6350" cap="flat" cmpd="sng" algn="ctr">
+                      <a:solidFill>
+                        <a:srgbClr val="D9D9D9"/>
+                      </a:solidFill>
+                      <a:prstDash val="solid"/>
+                      <a:round/>
+                      <a:headEnd type="none" w="med" len="med"/>
+                      <a:tailEnd type="none" w="med" len="med"/>
+                    </a:lnB>
+                    <a:solidFill>
+                      <a:srgbClr val="0079C2"/>
+                    </a:solidFill>
+                  </a:tcPr>
+                </a:tc>
+              </a:tr>
+              <a:tr h="347472">
+                <a:tc>
+                  <a:txBody>
+                    <a:bodyPr/>
+                    <a:lstStyle/>
+                    <a:p>
+                      <a:pPr indent="0" marL="0">
+                        <a:buNone/>
+                      </a:pPr>
+                      <a:r>
+                        <a:rPr lang="en-US" sz="1000" dirty="0">
+                          <a:solidFill>
+                            <a:srgbClr val="262626"/>
+                          </a:solidFill>
+                          <a:latin typeface="Noto Sans JP" pitchFamily="34" charset="0"/>
+                          <a:ea typeface="Noto Sans JP" pitchFamily="34" charset="-122"/>
+                          <a:cs typeface="Noto Sans JP" pitchFamily="34" charset="-120"/>
+                        </a:rPr>
+                        <a:t>FY2025</a:t>
+                      </a:r>
+                      <a:endParaRPr lang="en-US" sz="1000" dirty="0">
+                        <a:latin typeface="Noto Sans JP" charset="0"/>
+                        <a:ea typeface="Noto Sans JP" charset="0"/>
+                        <a:cs typeface="Noto Sans JP" charset="0"/>
+                      </a:endParaRPr>
+                    </a:p>
+                  </a:txBody>
+                  <a:tcPr marL="45720" marR="45720" marT="45720" marB="45720" anchor="ctr">
+                    <a:lnL w="6350" cap="flat" cmpd="sng" algn="ctr">
+                      <a:solidFill>
+                        <a:srgbClr val="D9D9D9"/>
+                      </a:solidFill>
+                      <a:prstDash val="solid"/>
+                      <a:round/>
+                      <a:headEnd type="none" w="med" len="med"/>
+                      <a:tailEnd type="none" w="med" len="med"/>
+                    </a:lnL>
+                    <a:lnR w="6350" cap="flat" cmpd="sng" algn="ctr">
+                      <a:solidFill>
+                        <a:srgbClr val="D9D9D9"/>
+                      </a:solidFill>
+                      <a:prstDash val="solid"/>
+                      <a:round/>
+                      <a:headEnd type="none" w="med" len="med"/>
+                      <a:tailEnd type="none" w="med" len="med"/>
+                    </a:lnR>
+                    <a:lnT w="6350" cap="flat" cmpd="sng" algn="ctr">
+                      <a:solidFill>
+                        <a:srgbClr val="D9D9D9"/>
+                      </a:solidFill>
+                      <a:prstDash val="solid"/>
+                      <a:round/>
+                      <a:headEnd type="none" w="med" len="med"/>
+                      <a:tailEnd type="none" w="med" len="med"/>
+                    </a:lnT>
+                    <a:lnB w="6350" cap="flat" cmpd="sng" algn="ctr">
+                      <a:solidFill>
+                        <a:srgbClr val="D9D9D9"/>
+                      </a:solidFill>
+                      <a:prstDash val="solid"/>
+                      <a:round/>
+                      <a:headEnd type="none" w="med" len="med"/>
+                      <a:tailEnd type="none" w="med" len="med"/>
+                    </a:lnB>
+                    <a:solidFill>
+                      <a:srgbClr val="FFFFFF"/>
+                    </a:solidFill>
+                  </a:tcPr>
+                </a:tc>
+                <a:tc>
+                  <a:txBody>
+                    <a:bodyPr/>
+                    <a:lstStyle/>
+                    <a:p>
+                      <a:pPr indent="0" marL="0">
+                        <a:buNone/>
+                      </a:pPr>
+                      <a:r>
+                        <a:rPr lang="en-US" sz="1000" dirty="0">
+                          <a:solidFill>
+                            <a:srgbClr val="262626"/>
+                          </a:solidFill>
+                          <a:latin typeface="Noto Sans JP" pitchFamily="34" charset="0"/>
+                          <a:ea typeface="Noto Sans JP" pitchFamily="34" charset="-122"/>
+                          <a:cs typeface="Noto Sans JP" pitchFamily="34" charset="-120"/>
+                        </a:rPr>
+                        <a:t>60%</a:t>
+                      </a:r>
+                      <a:endParaRPr lang="en-US" sz="1000" dirty="0">
+                        <a:latin typeface="Noto Sans JP" charset="0"/>
+                        <a:ea typeface="Noto Sans JP" charset="0"/>
+                        <a:cs typeface="Noto Sans JP" charset="0"/>
+                      </a:endParaRPr>
+                    </a:p>
+                  </a:txBody>
+                  <a:tcPr marL="45720" marR="45720" marT="45720" marB="45720" anchor="ctr">
+                    <a:lnL w="6350" cap="flat" cmpd="sng" algn="ctr">
+                      <a:solidFill>
+                        <a:srgbClr val="D9D9D9"/>
+                      </a:solidFill>
+                      <a:prstDash val="solid"/>
+                      <a:round/>
+                      <a:headEnd type="none" w="med" len="med"/>
+                      <a:tailEnd type="none" w="med" len="med"/>
+                    </a:lnL>
+                    <a:lnR w="6350" cap="flat" cmpd="sng" algn="ctr">
+                      <a:solidFill>
+                        <a:srgbClr val="D9D9D9"/>
+                      </a:solidFill>
+                      <a:prstDash val="solid"/>
+                      <a:round/>
+                      <a:headEnd type="none" w="med" len="med"/>
+                      <a:tailEnd type="none" w="med" len="med"/>
+                    </a:lnR>
+                    <a:lnT w="6350" cap="flat" cmpd="sng" algn="ctr">
+                      <a:solidFill>
+                        <a:srgbClr val="D9D9D9"/>
+                      </a:solidFill>
+                      <a:prstDash val="solid"/>
+                      <a:round/>
+                      <a:headEnd type="none" w="med" len="med"/>
+                      <a:tailEnd type="none" w="med" len="med"/>
+                    </a:lnT>
+                    <a:lnB w="6350" cap="flat" cmpd="sng" algn="ctr">
+                      <a:solidFill>
+                        <a:srgbClr val="D9D9D9"/>
+                      </a:solidFill>
+                      <a:prstDash val="solid"/>
+                      <a:round/>
+                      <a:headEnd type="none" w="med" len="med"/>
+                      <a:tailEnd type="none" w="med" len="med"/>
+                    </a:lnB>
+                    <a:solidFill>
+                      <a:srgbClr val="FFFFFF"/>
+                    </a:solidFill>
+                  </a:tcPr>
+                </a:tc>
+                <a:tc>
+                  <a:txBody>
+                    <a:bodyPr/>
+                    <a:lstStyle/>
+                    <a:p>
+                      <a:pPr indent="0" marL="0">
+                        <a:buNone/>
+                      </a:pPr>
+                      <a:r>
+                        <a:rPr lang="en-US" sz="1000" dirty="0">
+                          <a:solidFill>
+                            <a:srgbClr val="262626"/>
+                          </a:solidFill>
+                          <a:latin typeface="Noto Sans JP" pitchFamily="34" charset="0"/>
+                          <a:ea typeface="Noto Sans JP" pitchFamily="34" charset="-122"/>
+                          <a:cs typeface="Noto Sans JP" pitchFamily="34" charset="-120"/>
+                        </a:rPr>
+                        <a:t>28%</a:t>
+                      </a:r>
+                      <a:endParaRPr lang="en-US" sz="1000" dirty="0">
+                        <a:latin typeface="Noto Sans JP" charset="0"/>
+                        <a:ea typeface="Noto Sans JP" charset="0"/>
+                        <a:cs typeface="Noto Sans JP" charset="0"/>
+                      </a:endParaRPr>
+                    </a:p>
+                  </a:txBody>
+                  <a:tcPr marL="45720" marR="45720" marT="45720" marB="45720" anchor="ctr">
+                    <a:lnL w="6350" cap="flat" cmpd="sng" algn="ctr">
+                      <a:solidFill>
+                        <a:srgbClr val="D9D9D9"/>
+                      </a:solidFill>
+                      <a:prstDash val="solid"/>
+                      <a:round/>
+                      <a:headEnd type="none" w="med" len="med"/>
+                      <a:tailEnd type="none" w="med" len="med"/>
+                    </a:lnL>
+                    <a:lnR w="6350" cap="flat" cmpd="sng" algn="ctr">
+                      <a:solidFill>
+                        <a:srgbClr val="D9D9D9"/>
+                      </a:solidFill>
+                      <a:prstDash val="solid"/>
+                      <a:round/>
+                      <a:headEnd type="none" w="med" len="med"/>
+                      <a:tailEnd type="none" w="med" len="med"/>
+                    </a:lnR>
+                    <a:lnT w="6350" cap="flat" cmpd="sng" algn="ctr">
+                      <a:solidFill>
+                        <a:srgbClr val="D9D9D9"/>
+                      </a:solidFill>
+                      <a:prstDash val="solid"/>
+                      <a:round/>
+                      <a:headEnd type="none" w="med" len="med"/>
+                      <a:tailEnd type="none" w="med" len="med"/>
+                    </a:lnT>
+                    <a:lnB w="6350" cap="flat" cmpd="sng" algn="ctr">
+                      <a:solidFill>
+                        <a:srgbClr val="D9D9D9"/>
+                      </a:solidFill>
+                      <a:prstDash val="solid"/>
+                      <a:round/>
+                      <a:headEnd type="none" w="med" len="med"/>
+                      <a:tailEnd type="none" w="med" len="med"/>
+                    </a:lnB>
+                    <a:solidFill>
+                      <a:srgbClr val="FFFFFF"/>
+                    </a:solidFill>
+                  </a:tcPr>
+                </a:tc>
+                <a:tc>
+                  <a:txBody>
+                    <a:bodyPr/>
+                    <a:lstStyle/>
+                    <a:p>
+                      <a:pPr indent="0" marL="0">
+                        <a:buNone/>
+                      </a:pPr>
+                      <a:r>
+                        <a:rPr lang="en-US" sz="1000" b="1" dirty="0">
+                          <a:solidFill>
+                            <a:srgbClr val="D95B20"/>
+                          </a:solidFill>
+                          <a:latin typeface="Noto Sans JP" pitchFamily="34" charset="0"/>
+                          <a:ea typeface="Noto Sans JP" pitchFamily="34" charset="-122"/>
+                          <a:cs typeface="Noto Sans JP" pitchFamily="34" charset="-120"/>
+                        </a:rPr>
+                        <a:t>12.8%</a:t>
+                      </a:r>
+                      <a:endParaRPr lang="en-US" sz="1000" dirty="0">
+                        <a:latin typeface="Noto Sans JP" charset="0"/>
+                        <a:ea typeface="Noto Sans JP" charset="0"/>
+                        <a:cs typeface="Noto Sans JP" charset="0"/>
+                      </a:endParaRPr>
+                    </a:p>
+                  </a:txBody>
+                  <a:tcPr marL="45720" marR="45720" marT="45720" marB="45720" anchor="ctr">
+                    <a:lnL w="6350" cap="flat" cmpd="sng" algn="ctr">
+                      <a:solidFill>
+                        <a:srgbClr val="D9D9D9"/>
+                      </a:solidFill>
+                      <a:prstDash val="solid"/>
+                      <a:round/>
+                      <a:headEnd type="none" w="med" len="med"/>
+                      <a:tailEnd type="none" w="med" len="med"/>
+                    </a:lnL>
+                    <a:lnR w="6350" cap="flat" cmpd="sng" algn="ctr">
+                      <a:solidFill>
+                        <a:srgbClr val="D9D9D9"/>
+                      </a:solidFill>
+                      <a:prstDash val="solid"/>
+                      <a:round/>
+                      <a:headEnd type="none" w="med" len="med"/>
+                      <a:tailEnd type="none" w="med" len="med"/>
+                    </a:lnR>
+                    <a:lnT w="6350" cap="flat" cmpd="sng" algn="ctr">
+                      <a:solidFill>
+                        <a:srgbClr val="D9D9D9"/>
+                      </a:solidFill>
+                      <a:prstDash val="solid"/>
+                      <a:round/>
+                      <a:headEnd type="none" w="med" len="med"/>
+                      <a:tailEnd type="none" w="med" len="med"/>
+                    </a:lnT>
+                    <a:lnB w="6350" cap="flat" cmpd="sng" algn="ctr">
+                      <a:solidFill>
+                        <a:srgbClr val="D9D9D9"/>
+                      </a:solidFill>
+                      <a:prstDash val="solid"/>
+                      <a:round/>
+                      <a:headEnd type="none" w="med" len="med"/>
+                      <a:tailEnd type="none" w="med" len="med"/>
+                    </a:lnB>
+                    <a:solidFill>
+                      <a:srgbClr val="FFFFFF"/>
+                    </a:solidFill>
+                  </a:tcPr>
+                </a:tc>
+              </a:tr>
+              <a:tr h="347472">
+                <a:tc>
+                  <a:txBody>
+                    <a:bodyPr/>
+                    <a:lstStyle/>
+                    <a:p>
+                      <a:pPr indent="0" marL="0">
+                        <a:buNone/>
+                      </a:pPr>
+                      <a:r>
+                        <a:rPr lang="en-US" sz="1000" dirty="0">
+                          <a:solidFill>
+                            <a:srgbClr val="262626"/>
+                          </a:solidFill>
+                          <a:latin typeface="Noto Sans JP" pitchFamily="34" charset="0"/>
+                          <a:ea typeface="Noto Sans JP" pitchFamily="34" charset="-122"/>
+                          <a:cs typeface="Noto Sans JP" pitchFamily="34" charset="-120"/>
+                        </a:rPr>
+                        <a:t>FY2026</a:t>
+                      </a:r>
+                      <a:endParaRPr lang="en-US" sz="1000" dirty="0">
+                        <a:latin typeface="Noto Sans JP" charset="0"/>
+                        <a:ea typeface="Noto Sans JP" charset="0"/>
+                        <a:cs typeface="Noto Sans JP" charset="0"/>
+                      </a:endParaRPr>
+                    </a:p>
+                  </a:txBody>
+                  <a:tcPr marL="45720" marR="45720" marT="45720" marB="45720" anchor="ctr">
+                    <a:lnL w="6350" cap="flat" cmpd="sng" algn="ctr">
+                      <a:solidFill>
+                        <a:srgbClr val="D9D9D9"/>
+                      </a:solidFill>
+                      <a:prstDash val="solid"/>
+                      <a:round/>
+                      <a:headEnd type="none" w="med" len="med"/>
+                      <a:tailEnd type="none" w="med" len="med"/>
+                    </a:lnL>
+                    <a:lnR w="6350" cap="flat" cmpd="sng" algn="ctr">
+                      <a:solidFill>
+                        <a:srgbClr val="D9D9D9"/>
+                      </a:solidFill>
+                      <a:prstDash val="solid"/>
+                      <a:round/>
+                      <a:headEnd type="none" w="med" len="med"/>
+                      <a:tailEnd type="none" w="med" len="med"/>
+                    </a:lnR>
+                    <a:lnT w="6350" cap="flat" cmpd="sng" algn="ctr">
+                      <a:solidFill>
+                        <a:srgbClr val="D9D9D9"/>
+                      </a:solidFill>
+                      <a:prstDash val="solid"/>
+                      <a:round/>
+                      <a:headEnd type="none" w="med" len="med"/>
+                      <a:tailEnd type="none" w="med" len="med"/>
+                    </a:lnT>
+                    <a:lnB w="6350" cap="flat" cmpd="sng" algn="ctr">
+                      <a:solidFill>
+                        <a:srgbClr val="D9D9D9"/>
+                      </a:solidFill>
+                      <a:prstDash val="solid"/>
+                      <a:round/>
+                      <a:headEnd type="none" w="med" len="med"/>
+                      <a:tailEnd type="none" w="med" len="med"/>
+                    </a:lnB>
+                    <a:solidFill>
+                      <a:srgbClr val="F0F6FB"/>
+                    </a:solidFill>
+                  </a:tcPr>
+                </a:tc>
+                <a:tc>
+                  <a:txBody>
+                    <a:bodyPr/>
+                    <a:lstStyle/>
+                    <a:p>
+                      <a:pPr indent="0" marL="0">
+                        <a:buNone/>
+                      </a:pPr>
+                      <a:r>
+                        <a:rPr lang="en-US" sz="1000" dirty="0">
+                          <a:solidFill>
+                            <a:srgbClr val="262626"/>
+                          </a:solidFill>
+                          <a:latin typeface="Noto Sans JP" pitchFamily="34" charset="0"/>
+                          <a:ea typeface="Noto Sans JP" pitchFamily="34" charset="-122"/>
+                          <a:cs typeface="Noto Sans JP" pitchFamily="34" charset="-120"/>
+                        </a:rPr>
+                        <a:t>68%</a:t>
+                      </a:r>
+                      <a:endParaRPr lang="en-US" sz="1000" dirty="0">
+                        <a:latin typeface="Noto Sans JP" charset="0"/>
+                        <a:ea typeface="Noto Sans JP" charset="0"/>
+                        <a:cs typeface="Noto Sans JP" charset="0"/>
+                      </a:endParaRPr>
+                    </a:p>
+                  </a:txBody>
+                  <a:tcPr marL="45720" marR="45720" marT="45720" marB="45720" anchor="ctr">
+                    <a:lnL w="6350" cap="flat" cmpd="sng" algn="ctr">
+                      <a:solidFill>
+                        <a:srgbClr val="D9D9D9"/>
+                      </a:solidFill>
+                      <a:prstDash val="solid"/>
+                      <a:round/>
+                      <a:headEnd type="none" w="med" len="med"/>
+                      <a:tailEnd type="none" w="med" len="med"/>
+                    </a:lnL>
+                    <a:lnR w="6350" cap="flat" cmpd="sng" algn="ctr">
+                      <a:solidFill>
+                        <a:srgbClr val="D9D9D9"/>
+                      </a:solidFill>
+                      <a:prstDash val="solid"/>
+                      <a:round/>
+                      <a:headEnd type="none" w="med" len="med"/>
+                      <a:tailEnd type="none" w="med" len="med"/>
+                    </a:lnR>
+                    <a:lnT w="6350" cap="flat" cmpd="sng" algn="ctr">
+                      <a:solidFill>
+                        <a:srgbClr val="D9D9D9"/>
+                      </a:solidFill>
+                      <a:prstDash val="solid"/>
+                      <a:round/>
+                      <a:headEnd type="none" w="med" len="med"/>
+                      <a:tailEnd type="none" w="med" len="med"/>
+                    </a:lnT>
+                    <a:lnB w="6350" cap="flat" cmpd="sng" algn="ctr">
+                      <a:solidFill>
+                        <a:srgbClr val="D9D9D9"/>
+                      </a:solidFill>
+                      <a:prstDash val="solid"/>
+                      <a:round/>
+                      <a:headEnd type="none" w="med" len="med"/>
+                      <a:tailEnd type="none" w="med" len="med"/>
+                    </a:lnB>
+                    <a:solidFill>
+                      <a:srgbClr val="F0F6FB"/>
+                    </a:solidFill>
+                  </a:tcPr>
+                </a:tc>
+                <a:tc>
+                  <a:txBody>
+                    <a:bodyPr/>
+                    <a:lstStyle/>
+                    <a:p>
+                      <a:pPr indent="0" marL="0">
+                        <a:buNone/>
+                      </a:pPr>
+                      <a:r>
+                        <a:rPr lang="en-US" sz="1000" dirty="0">
+                          <a:solidFill>
+                            <a:srgbClr val="262626"/>
+                          </a:solidFill>
+                          <a:latin typeface="Noto Sans JP" pitchFamily="34" charset="0"/>
+                          <a:ea typeface="Noto Sans JP" pitchFamily="34" charset="-122"/>
+                          <a:cs typeface="Noto Sans JP" pitchFamily="34" charset="-120"/>
+                        </a:rPr>
+                        <a:t>19%</a:t>
+                      </a:r>
+                      <a:endParaRPr lang="en-US" sz="1000" dirty="0">
+                        <a:latin typeface="Noto Sans JP" charset="0"/>
+                        <a:ea typeface="Noto Sans JP" charset="0"/>
+                        <a:cs typeface="Noto Sans JP" charset="0"/>
+                      </a:endParaRPr>
+                    </a:p>
+                  </a:txBody>
+                  <a:tcPr marL="45720" marR="45720" marT="45720" marB="45720" anchor="ctr">
+                    <a:lnL w="6350" cap="flat" cmpd="sng" algn="ctr">
+                      <a:solidFill>
+                        <a:srgbClr val="D9D9D9"/>
+                      </a:solidFill>
+                      <a:prstDash val="solid"/>
+                      <a:round/>
+                      <a:headEnd type="none" w="med" len="med"/>
+                      <a:tailEnd type="none" w="med" len="med"/>
+                    </a:lnL>
+                    <a:lnR w="6350" cap="flat" cmpd="sng" algn="ctr">
+                      <a:solidFill>
+                        <a:srgbClr val="D9D9D9"/>
+                      </a:solidFill>
+                      <a:prstDash val="solid"/>
+                      <a:round/>
+                      <a:headEnd type="none" w="med" len="med"/>
+                      <a:tailEnd type="none" w="med" len="med"/>
+                    </a:lnR>
+                    <a:lnT w="6350" cap="flat" cmpd="sng" algn="ctr">
+                      <a:solidFill>
+                        <a:srgbClr val="D9D9D9"/>
+                      </a:solidFill>
+                      <a:prstDash val="solid"/>
+                      <a:round/>
+                      <a:headEnd type="none" w="med" len="med"/>
+                      <a:tailEnd type="none" w="med" len="med"/>
+                    </a:lnT>
+                    <a:lnB w="6350" cap="flat" cmpd="sng" algn="ctr">
+                      <a:solidFill>
+                        <a:srgbClr val="D9D9D9"/>
+                      </a:solidFill>
+                      <a:prstDash val="solid"/>
+                      <a:round/>
+                      <a:headEnd type="none" w="med" len="med"/>
+                      <a:tailEnd type="none" w="med" len="med"/>
+                    </a:lnB>
+                    <a:solidFill>
+                      <a:srgbClr val="F0F6FB"/>
+                    </a:solidFill>
+                  </a:tcPr>
+                </a:tc>
+                <a:tc>
+                  <a:txBody>
+                    <a:bodyPr/>
+                    <a:lstStyle/>
+                    <a:p>
+                      <a:pPr indent="0" marL="0">
+                        <a:buNone/>
+                      </a:pPr>
+                      <a:r>
+                        <a:rPr lang="en-US" sz="1000" b="1" dirty="0">
+                          <a:solidFill>
+                            <a:srgbClr val="D95B20"/>
+                          </a:solidFill>
+                          <a:latin typeface="Noto Sans JP" pitchFamily="34" charset="0"/>
+                          <a:ea typeface="Noto Sans JP" pitchFamily="34" charset="-122"/>
+                          <a:cs typeface="Noto Sans JP" pitchFamily="34" charset="-120"/>
+                        </a:rPr>
+                        <a:t>12.8%</a:t>
+                      </a:r>
+                      <a:endParaRPr lang="en-US" sz="1000" dirty="0">
+                        <a:latin typeface="Noto Sans JP" charset="0"/>
+                        <a:ea typeface="Noto Sans JP" charset="0"/>
+                        <a:cs typeface="Noto Sans JP" charset="0"/>
+                      </a:endParaRPr>
+                    </a:p>
+                  </a:txBody>
+                  <a:tcPr marL="45720" marR="45720" marT="45720" marB="45720" anchor="ctr">
+                    <a:lnL w="6350" cap="flat" cmpd="sng" algn="ctr">
+                      <a:solidFill>
+                        <a:srgbClr val="D9D9D9"/>
+                      </a:solidFill>
+                      <a:prstDash val="solid"/>
+                      <a:round/>
+                      <a:headEnd type="none" w="med" len="med"/>
+                      <a:tailEnd type="none" w="med" len="med"/>
+                    </a:lnL>
+                    <a:lnR w="6350" cap="flat" cmpd="sng" algn="ctr">
+                      <a:solidFill>
+                        <a:srgbClr val="D9D9D9"/>
+                      </a:solidFill>
+                      <a:prstDash val="solid"/>
+                      <a:round/>
+                      <a:headEnd type="none" w="med" len="med"/>
+                      <a:tailEnd type="none" w="med" len="med"/>
+                    </a:lnR>
+                    <a:lnT w="6350" cap="flat" cmpd="sng" algn="ctr">
+                      <a:solidFill>
+                        <a:srgbClr val="D9D9D9"/>
+                      </a:solidFill>
+                      <a:prstDash val="solid"/>
+                      <a:round/>
+                      <a:headEnd type="none" w="med" len="med"/>
+                      <a:tailEnd type="none" w="med" len="med"/>
+                    </a:lnT>
+                    <a:lnB w="6350" cap="flat" cmpd="sng" algn="ctr">
+                      <a:solidFill>
+                        <a:srgbClr val="D9D9D9"/>
+                      </a:solidFill>
+                      <a:prstDash val="solid"/>
+                      <a:round/>
+                      <a:headEnd type="none" w="med" len="med"/>
+                      <a:tailEnd type="none" w="med" len="med"/>
+                    </a:lnB>
+                    <a:solidFill>
+                      <a:srgbClr val="F0F6FB"/>
+                    </a:solidFill>
+                  </a:tcPr>
+                </a:tc>
+              </a:tr>
+            </a:tbl>
+          </a:graphicData>
+        </a:graphic>
+      </p:graphicFrame>
+      <p:sp>
+        <p:nvSpPr>
+          <p:cNvPr id="12" name="Text 8"/>
+          <p:cNvSpPr/>
+          <p:nvPr/>
+        </p:nvSpPr>
+        <p:spPr>
+          <a:xfrm>
+            <a:off x="685800" y="4526280"/>
+            <a:ext cx="5715000" cy="1280160"/>
+          </a:xfrm>
+          <a:prstGeom prst="rect">
+            <a:avLst/>
+          </a:prstGeom>
+          <a:noFill/>
+          <a:ln/>
+        </p:spPr>
+        <p:txBody>
+          <a:bodyPr wrap="square" lIns="0" tIns="0" rIns="0" bIns="0" rtlCol="0" anchor="t"/>
+          <a:lstStyle/>
+          <a:p>
+            <a:pPr lvl="1" marL="254000" indent="-127000">
+              <a:lnSpc>
+                <a:spcPct val="120000"/>
+              </a:lnSpc>
+              <a:spcAft>
+                <a:spcPts val="400"/>
+              </a:spcAft>
+              <a:buSzPct val="100000"/>
+              <a:buChar char="–"/>
+            </a:pPr>
+            <a:r>
+              <a:rPr lang="en-US" sz="1000" dirty="0">
+                <a:solidFill>
+                  <a:srgbClr val="262626"/>
+                </a:solidFill>
+                <a:latin typeface="Noto Sans JP" pitchFamily="34" charset="0"/>
+                <a:ea typeface="Noto Sans JP" pitchFamily="34" charset="-122"/>
+                <a:cs typeface="Noto Sans JP" pitchFamily="34" charset="-120"/>
+              </a:rPr>
+              <a:t>5円超での抑制＝エリア余剰でなくローカル系統混雑・下げ代制約。ノーダル価格がない日本では、この損失はエリア価格に映らない → 当方のπ_spotはBTM価値をゼロと計上（＝現行分析は価値の下限）</a:t>
+            </a:r>
+            <a:endParaRPr lang="en-US" sz="1000" dirty="0"/>
+          </a:p>
+        </p:txBody>
+      </p:sp>
+      <p:sp>
+        <p:nvSpPr>
+          <p:cNvPr id="13" name="Shape 9"/>
+          <p:cNvSpPr/>
+          <p:nvPr/>
+        </p:nvSpPr>
+        <p:spPr>
+          <a:xfrm>
+            <a:off x="6720840" y="1344168"/>
+            <a:ext cx="45720" cy="274320"/>
+          </a:xfrm>
+          <a:prstGeom prst="rect">
+            <a:avLst/>
+          </a:prstGeom>
+          <a:solidFill>
+            <a:srgbClr val="0079C2"/>
+          </a:solidFill>
+          <a:ln/>
+        </p:spPr>
+      </p:sp>
+      <p:sp>
+        <p:nvSpPr>
+          <p:cNvPr id="14" name="Text 10"/>
+          <p:cNvSpPr/>
+          <p:nvPr/>
+        </p:nvSpPr>
+        <p:spPr>
+          <a:xfrm>
+            <a:off x="6848856" y="1325880"/>
+            <a:ext cx="4846320" cy="310896"/>
+          </a:xfrm>
+          <a:prstGeom prst="rect">
+            <a:avLst/>
+          </a:prstGeom>
+          <a:noFill/>
+          <a:ln/>
+        </p:spPr>
+        <p:txBody>
+          <a:bodyPr wrap="square" lIns="0" tIns="0" rIns="0" bIns="0" rtlCol="0" anchor="ctr"/>
+          <a:lstStyle/>
+          <a:p>
+            <a:pPr indent="0" marL="0">
+              <a:buNone/>
+            </a:pPr>
+            <a:r>
+              <a:rPr lang="en-US" sz="1300" b="1" dirty="0">
+                <a:solidFill>
+                  <a:srgbClr val="000000"/>
+                </a:solidFill>
+                <a:latin typeface="Noto Sans JP SemiBold" pitchFamily="34" charset="0"/>
+                <a:ea typeface="Noto Sans JP SemiBold" pitchFamily="34" charset="-122"/>
+                <a:cs typeface="Noto Sans JP SemiBold" pitchFamily="34" charset="-120"/>
+              </a:rPr>
+              <a:t>根拠③ 回避価値の上限試算（cf26%・FIP14円）</a:t>
+            </a:r>
+            <a:endParaRPr lang="en-US" sz="1300" dirty="0"/>
+          </a:p>
+        </p:txBody>
+      </p:sp>
+      <p:graphicFrame>
+        <p:nvGraphicFramePr>
+          <p:cNvPr id="34" name="Table 2"/>
+          <p:cNvGraphicFramePr>
+            <a:graphicFrameLocks noGrp="1"/>
+          </p:cNvGraphicFramePr>
+          <p:nvPr>
+            <p:extLst>
+              <p:ext uri="{D42A27DB-BD31-4B8C-83A1-F6EECF244321}">
+                <p14:modId xmlns:p14="http://schemas.microsoft.com/office/powerpoint/2010/main" val="1579011935"/>
+              </p:ext>
+            </p:extLst>
+          </p:nvPr>
+        </p:nvGraphicFramePr>
+        <p:xfrm>
+          <a:off x="6720840" y="1691640"/>
+          <a:ext cx="4919472" cy="914400"/>
+        </p:xfrm>
+        <a:graphic>
+          <a:graphicData uri="http://schemas.openxmlformats.org/drawingml/2006/table">
+            <a:tbl>
+              <a:tblPr/>
+              <a:tblGrid>
+                <a:gridCol w="1920240"/>
+                <a:gridCol w="1371600"/>
+                <a:gridCol w="1627632"/>
+              </a:tblGrid>
+              <a:tr h="365760">
+                <a:tc>
+                  <a:txBody>
+                    <a:bodyPr/>
+                    <a:lstStyle/>
+                    <a:p>
+                      <a:pPr indent="0" marL="0">
+                        <a:buNone/>
+                      </a:pPr>
+                      <a:r>
+                        <a:rPr lang="en-US" sz="1000" b="1" dirty="0">
+                          <a:solidFill>
+                            <a:srgbClr val="FFFFFF"/>
+                          </a:solidFill>
+                          <a:latin typeface="Noto Sans JP" pitchFamily="34" charset="0"/>
+                          <a:ea typeface="Noto Sans JP" pitchFamily="34" charset="-122"/>
+                          <a:cs typeface="Noto Sans JP" pitchFamily="34" charset="-120"/>
+                        </a:rPr>
+                        <a:t>抑制率シナリオ</a:t>
+                      </a:r>
+                      <a:endParaRPr lang="en-US" sz="1000" dirty="0">
+                        <a:latin typeface="Noto Sans JP" charset="0"/>
+                        <a:ea typeface="Noto Sans JP" charset="0"/>
+                        <a:cs typeface="Noto Sans JP" charset="0"/>
+                      </a:endParaRPr>
+                    </a:p>
+                  </a:txBody>
+                  <a:tcPr marL="45720" marR="45720" marT="45720" marB="45720" anchor="ctr">
+                    <a:lnL w="6350" cap="flat" cmpd="sng" algn="ctr">
+                      <a:solidFill>
+                        <a:srgbClr val="D9D9D9"/>
+                      </a:solidFill>
+                      <a:prstDash val="solid"/>
+                      <a:round/>
+                      <a:headEnd type="none" w="med" len="med"/>
+                      <a:tailEnd type="none" w="med" len="med"/>
+                    </a:lnL>
+                    <a:lnR w="6350" cap="flat" cmpd="sng" algn="ctr">
+                      <a:solidFill>
+                        <a:srgbClr val="D9D9D9"/>
+                      </a:solidFill>
+                      <a:prstDash val="solid"/>
+                      <a:round/>
+                      <a:headEnd type="none" w="med" len="med"/>
+                      <a:tailEnd type="none" w="med" len="med"/>
+                    </a:lnR>
+                    <a:lnT w="6350" cap="flat" cmpd="sng" algn="ctr">
+                      <a:solidFill>
+                        <a:srgbClr val="D9D9D9"/>
+                      </a:solidFill>
+                      <a:prstDash val="solid"/>
+                      <a:round/>
+                      <a:headEnd type="none" w="med" len="med"/>
+                      <a:tailEnd type="none" w="med" len="med"/>
+                    </a:lnT>
+                    <a:lnB w="6350" cap="flat" cmpd="sng" algn="ctr">
+                      <a:solidFill>
+                        <a:srgbClr val="D9D9D9"/>
+                      </a:solidFill>
+                      <a:prstDash val="solid"/>
+                      <a:round/>
+                      <a:headEnd type="none" w="med" len="med"/>
+                      <a:tailEnd type="none" w="med" len="med"/>
+                    </a:lnB>
+                    <a:solidFill>
+                      <a:srgbClr val="0079C2"/>
+                    </a:solidFill>
+                  </a:tcPr>
+                </a:tc>
+                <a:tc>
+                  <a:txBody>
+                    <a:bodyPr/>
+                    <a:lstStyle/>
+                    <a:p>
+                      <a:pPr indent="0" marL="0">
+                        <a:buNone/>
+                      </a:pPr>
+                      <a:r>
+                        <a:rPr lang="en-US" sz="1000" b="1" dirty="0">
+                          <a:solidFill>
+                            <a:srgbClr val="FFFFFF"/>
+                          </a:solidFill>
+                          <a:latin typeface="Noto Sans JP" pitchFamily="34" charset="0"/>
+                          <a:ea typeface="Noto Sans JP" pitchFamily="34" charset="-122"/>
+                          <a:cs typeface="Noto Sans JP" pitchFamily="34" charset="-120"/>
+                        </a:rPr>
+                        <a:t>円/kW風力-年</a:t>
+                      </a:r>
+                      <a:endParaRPr lang="en-US" sz="1000" dirty="0">
+                        <a:latin typeface="Noto Sans JP" charset="0"/>
+                        <a:ea typeface="Noto Sans JP" charset="0"/>
+                        <a:cs typeface="Noto Sans JP" charset="0"/>
+                      </a:endParaRPr>
+                    </a:p>
+                  </a:txBody>
+                  <a:tcPr marL="45720" marR="45720" marT="45720" marB="45720" anchor="ctr">
+                    <a:lnL w="6350" cap="flat" cmpd="sng" algn="ctr">
+                      <a:solidFill>
+                        <a:srgbClr val="D9D9D9"/>
+                      </a:solidFill>
+                      <a:prstDash val="solid"/>
+                      <a:round/>
+                      <a:headEnd type="none" w="med" len="med"/>
+                      <a:tailEnd type="none" w="med" len="med"/>
+                    </a:lnL>
+                    <a:lnR w="6350" cap="flat" cmpd="sng" algn="ctr">
+                      <a:solidFill>
+                        <a:srgbClr val="D9D9D9"/>
+                      </a:solidFill>
+                      <a:prstDash val="solid"/>
+                      <a:round/>
+                      <a:headEnd type="none" w="med" len="med"/>
+                      <a:tailEnd type="none" w="med" len="med"/>
+                    </a:lnR>
+                    <a:lnT w="6350" cap="flat" cmpd="sng" algn="ctr">
+                      <a:solidFill>
+                        <a:srgbClr val="D9D9D9"/>
+                      </a:solidFill>
+                      <a:prstDash val="solid"/>
+                      <a:round/>
+                      <a:headEnd type="none" w="med" len="med"/>
+                      <a:tailEnd type="none" w="med" len="med"/>
+                    </a:lnT>
+                    <a:lnB w="6350" cap="flat" cmpd="sng" algn="ctr">
+                      <a:solidFill>
+                        <a:srgbClr val="D9D9D9"/>
+                      </a:solidFill>
+                      <a:prstDash val="solid"/>
+                      <a:round/>
+                      <a:headEnd type="none" w="med" len="med"/>
+                      <a:tailEnd type="none" w="med" len="med"/>
+                    </a:lnB>
+                    <a:solidFill>
+                      <a:srgbClr val="0079C2"/>
+                    </a:solidFill>
+                  </a:tcPr>
+                </a:tc>
+                <a:tc>
+                  <a:txBody>
+                    <a:bodyPr/>
+                    <a:lstStyle/>
+                    <a:p>
+                      <a:pPr indent="0" marL="0">
+                        <a:buNone/>
+                      </a:pPr>
+                      <a:r>
+                        <a:rPr lang="en-US" sz="1000" b="1" dirty="0">
+                          <a:solidFill>
+                            <a:srgbClr val="FFFFFF"/>
+                          </a:solidFill>
+                          <a:latin typeface="Noto Sans JP" pitchFamily="34" charset="0"/>
+                          <a:ea typeface="Noto Sans JP" pitchFamily="34" charset="-122"/>
+                          <a:cs typeface="Noto Sans JP" pitchFamily="34" charset="-120"/>
+                        </a:rPr>
+                        <a:t>併設0.64kWh/kWあたり</a:t>
+                      </a:r>
+                      <a:endParaRPr lang="en-US" sz="1000" dirty="0">
+                        <a:latin typeface="Noto Sans JP" charset="0"/>
+                        <a:ea typeface="Noto Sans JP" charset="0"/>
+                        <a:cs typeface="Noto Sans JP" charset="0"/>
+                      </a:endParaRPr>
+                    </a:p>
+                  </a:txBody>
+                  <a:tcPr marL="45720" marR="45720" marT="45720" marB="45720" anchor="ctr">
+                    <a:lnL w="6350" cap="flat" cmpd="sng" algn="ctr">
+                      <a:solidFill>
+                        <a:srgbClr val="D9D9D9"/>
+                      </a:solidFill>
+                      <a:prstDash val="solid"/>
+                      <a:round/>
+                      <a:headEnd type="none" w="med" len="med"/>
+                      <a:tailEnd type="none" w="med" len="med"/>
+                    </a:lnL>
+                    <a:lnR w="6350" cap="flat" cmpd="sng" algn="ctr">
+                      <a:solidFill>
+                        <a:srgbClr val="D9D9D9"/>
+                      </a:solidFill>
+                      <a:prstDash val="solid"/>
+                      <a:round/>
+                      <a:headEnd type="none" w="med" len="med"/>
+                      <a:tailEnd type="none" w="med" len="med"/>
+                    </a:lnR>
+                    <a:lnT w="6350" cap="flat" cmpd="sng" algn="ctr">
+                      <a:solidFill>
+                        <a:srgbClr val="D9D9D9"/>
+                      </a:solidFill>
+                      <a:prstDash val="solid"/>
+                      <a:round/>
+                      <a:headEnd type="none" w="med" len="med"/>
+                      <a:tailEnd type="none" w="med" len="med"/>
+                    </a:lnT>
+                    <a:lnB w="6350" cap="flat" cmpd="sng" algn="ctr">
+                      <a:solidFill>
+                        <a:srgbClr val="D9D9D9"/>
+                      </a:solidFill>
+                      <a:prstDash val="solid"/>
+                      <a:round/>
+                      <a:headEnd type="none" w="med" len="med"/>
+                      <a:tailEnd type="none" w="med" len="med"/>
+                    </a:lnB>
+                    <a:solidFill>
+                      <a:srgbClr val="0079C2"/>
+                    </a:solidFill>
+                  </a:tcPr>
+                </a:tc>
+              </a:tr>
+              <a:tr h="365760">
+                <a:tc>
+                  <a:txBody>
+                    <a:bodyPr/>
+                    <a:lstStyle/>
+                    <a:p>
+                      <a:pPr indent="0" marL="0">
+                        <a:buNone/>
+                      </a:pPr>
+                      <a:r>
+                        <a:rPr lang="en-US" sz="1000" dirty="0">
+                          <a:solidFill>
+                            <a:srgbClr val="262626"/>
+                          </a:solidFill>
+                          <a:latin typeface="Noto Sans JP" pitchFamily="34" charset="0"/>
+                          <a:ea typeface="Noto Sans JP" pitchFamily="34" charset="-122"/>
+                          <a:cs typeface="Noto Sans JP" pitchFamily="34" charset="-120"/>
+                        </a:rPr>
+                        <a:t>現状 1.35%</a:t>
+                      </a:r>
+                      <a:endParaRPr lang="en-US" sz="1000" dirty="0">
+                        <a:latin typeface="Noto Sans JP" charset="0"/>
+                        <a:ea typeface="Noto Sans JP" charset="0"/>
+                        <a:cs typeface="Noto Sans JP" charset="0"/>
+                      </a:endParaRPr>
+                    </a:p>
+                  </a:txBody>
+                  <a:tcPr marL="45720" marR="45720" marT="45720" marB="45720" anchor="ctr">
+                    <a:lnL w="6350" cap="flat" cmpd="sng" algn="ctr">
+                      <a:solidFill>
+                        <a:srgbClr val="D9D9D9"/>
+                      </a:solidFill>
+                      <a:prstDash val="solid"/>
+                      <a:round/>
+                      <a:headEnd type="none" w="med" len="med"/>
+                      <a:tailEnd type="none" w="med" len="med"/>
+                    </a:lnL>
+                    <a:lnR w="6350" cap="flat" cmpd="sng" algn="ctr">
+                      <a:solidFill>
+                        <a:srgbClr val="D9D9D9"/>
+                      </a:solidFill>
+                      <a:prstDash val="solid"/>
+                      <a:round/>
+                      <a:headEnd type="none" w="med" len="med"/>
+                      <a:tailEnd type="none" w="med" len="med"/>
+                    </a:lnR>
+                    <a:lnT w="6350" cap="flat" cmpd="sng" algn="ctr">
+                      <a:solidFill>
+                        <a:srgbClr val="D9D9D9"/>
+                      </a:solidFill>
+                      <a:prstDash val="solid"/>
+                      <a:round/>
+                      <a:headEnd type="none" w="med" len="med"/>
+                      <a:tailEnd type="none" w="med" len="med"/>
+                    </a:lnT>
+                    <a:lnB w="6350" cap="flat" cmpd="sng" algn="ctr">
+                      <a:solidFill>
+                        <a:srgbClr val="D9D9D9"/>
+                      </a:solidFill>
+                      <a:prstDash val="solid"/>
+                      <a:round/>
+                      <a:headEnd type="none" w="med" len="med"/>
+                      <a:tailEnd type="none" w="med" len="med"/>
+                    </a:lnB>
+                    <a:solidFill>
+                      <a:srgbClr val="FFFFFF"/>
+                    </a:solidFill>
+                  </a:tcPr>
+                </a:tc>
+                <a:tc>
+                  <a:txBody>
+                    <a:bodyPr/>
+                    <a:lstStyle/>
+                    <a:p>
+                      <a:pPr indent="0" marL="0">
+                        <a:buNone/>
+                      </a:pPr>
+                      <a:r>
+                        <a:rPr lang="en-US" sz="1000" dirty="0">
+                          <a:solidFill>
+                            <a:srgbClr val="262626"/>
+                          </a:solidFill>
+                          <a:latin typeface="Noto Sans JP" pitchFamily="34" charset="0"/>
+                          <a:ea typeface="Noto Sans JP" pitchFamily="34" charset="-122"/>
+                          <a:cs typeface="Noto Sans JP" pitchFamily="34" charset="-120"/>
+                        </a:rPr>
+                        <a:t>430</a:t>
+                      </a:r>
+                      <a:endParaRPr lang="en-US" sz="1000" dirty="0">
+                        <a:latin typeface="Noto Sans JP" charset="0"/>
+                        <a:ea typeface="Noto Sans JP" charset="0"/>
+                        <a:cs typeface="Noto Sans JP" charset="0"/>
+                      </a:endParaRPr>
+                    </a:p>
+                  </a:txBody>
+                  <a:tcPr marL="45720" marR="45720" marT="45720" marB="45720" anchor="ctr">
+                    <a:lnL w="6350" cap="flat" cmpd="sng" algn="ctr">
+                      <a:solidFill>
+                        <a:srgbClr val="D9D9D9"/>
+                      </a:solidFill>
+                      <a:prstDash val="solid"/>
+                      <a:round/>
+                      <a:headEnd type="none" w="med" len="med"/>
+                      <a:tailEnd type="none" w="med" len="med"/>
+                    </a:lnL>
+                    <a:lnR w="6350" cap="flat" cmpd="sng" algn="ctr">
+                      <a:solidFill>
+                        <a:srgbClr val="D9D9D9"/>
+                      </a:solidFill>
+                      <a:prstDash val="solid"/>
+                      <a:round/>
+                      <a:headEnd type="none" w="med" len="med"/>
+                      <a:tailEnd type="none" w="med" len="med"/>
+                    </a:lnR>
+                    <a:lnT w="6350" cap="flat" cmpd="sng" algn="ctr">
+                      <a:solidFill>
+                        <a:srgbClr val="D9D9D9"/>
+                      </a:solidFill>
+                      <a:prstDash val="solid"/>
+                      <a:round/>
+                      <a:headEnd type="none" w="med" len="med"/>
+                      <a:tailEnd type="none" w="med" len="med"/>
+                    </a:lnT>
+                    <a:lnB w="6350" cap="flat" cmpd="sng" algn="ctr">
+                      <a:solidFill>
+                        <a:srgbClr val="D9D9D9"/>
+                      </a:solidFill>
+                      <a:prstDash val="solid"/>
+                      <a:round/>
+                      <a:headEnd type="none" w="med" len="med"/>
+                      <a:tailEnd type="none" w="med" len="med"/>
+                    </a:lnB>
+                    <a:solidFill>
+                      <a:srgbClr val="FFFFFF"/>
+                    </a:solidFill>
+                  </a:tcPr>
+                </a:tc>
+                <a:tc>
+                  <a:txBody>
+                    <a:bodyPr/>
+                    <a:lstStyle/>
+                    <a:p>
+                      <a:pPr indent="0" marL="0">
+                        <a:buNone/>
+                      </a:pPr>
+                      <a:r>
+                        <a:rPr lang="en-US" sz="1000" dirty="0">
+                          <a:solidFill>
+                            <a:srgbClr val="262626"/>
+                          </a:solidFill>
+                          <a:latin typeface="Noto Sans JP" pitchFamily="34" charset="0"/>
+                          <a:ea typeface="Noto Sans JP" pitchFamily="34" charset="-122"/>
+                          <a:cs typeface="Noto Sans JP" pitchFamily="34" charset="-120"/>
+                        </a:rPr>
+                        <a:t>673円/kWh-年</a:t>
+                      </a:r>
+                      <a:endParaRPr lang="en-US" sz="1000" dirty="0">
+                        <a:latin typeface="Noto Sans JP" charset="0"/>
+                        <a:ea typeface="Noto Sans JP" charset="0"/>
+                        <a:cs typeface="Noto Sans JP" charset="0"/>
+                      </a:endParaRPr>
+                    </a:p>
+                  </a:txBody>
+                  <a:tcPr marL="45720" marR="45720" marT="45720" marB="45720" anchor="ctr">
+                    <a:lnL w="6350" cap="flat" cmpd="sng" algn="ctr">
+                      <a:solidFill>
+                        <a:srgbClr val="D9D9D9"/>
+                      </a:solidFill>
+                      <a:prstDash val="solid"/>
+                      <a:round/>
+                      <a:headEnd type="none" w="med" len="med"/>
+                      <a:tailEnd type="none" w="med" len="med"/>
+                    </a:lnL>
+                    <a:lnR w="6350" cap="flat" cmpd="sng" algn="ctr">
+                      <a:solidFill>
+                        <a:srgbClr val="D9D9D9"/>
+                      </a:solidFill>
+                      <a:prstDash val="solid"/>
+                      <a:round/>
+                      <a:headEnd type="none" w="med" len="med"/>
+                      <a:tailEnd type="none" w="med" len="med"/>
+                    </a:lnR>
+                    <a:lnT w="6350" cap="flat" cmpd="sng" algn="ctr">
+                      <a:solidFill>
+                        <a:srgbClr val="D9D9D9"/>
+                      </a:solidFill>
+                      <a:prstDash val="solid"/>
+                      <a:round/>
+                      <a:headEnd type="none" w="med" len="med"/>
+                      <a:tailEnd type="none" w="med" len="med"/>
+                    </a:lnT>
+                    <a:lnB w="6350" cap="flat" cmpd="sng" algn="ctr">
+                      <a:solidFill>
+                        <a:srgbClr val="D9D9D9"/>
+                      </a:solidFill>
+                      <a:prstDash val="solid"/>
+                      <a:round/>
+                      <a:headEnd type="none" w="med" len="med"/>
+                      <a:tailEnd type="none" w="med" len="med"/>
+                    </a:lnB>
+                    <a:solidFill>
+                      <a:srgbClr val="FFFFFF"/>
+                    </a:solidFill>
+                  </a:tcPr>
+                </a:tc>
+              </a:tr>
+              <a:tr h="365760">
+                <a:tc>
+                  <a:txBody>
+                    <a:bodyPr/>
+                    <a:lstStyle/>
+                    <a:p>
+                      <a:pPr indent="0" marL="0">
+                        <a:buNone/>
+                      </a:pPr>
+                      <a:r>
+                        <a:rPr lang="en-US" sz="1000" dirty="0">
+                          <a:solidFill>
+                            <a:srgbClr val="262626"/>
+                          </a:solidFill>
+                          <a:latin typeface="Noto Sans JP" pitchFamily="34" charset="0"/>
+                          <a:ea typeface="Noto Sans JP" pitchFamily="34" charset="-122"/>
+                          <a:cs typeface="Noto Sans JP" pitchFamily="34" charset="-120"/>
+                        </a:rPr>
+                        <a:t>3%</a:t>
+                      </a:r>
+                      <a:endParaRPr lang="en-US" sz="1000" dirty="0">
+                        <a:latin typeface="Noto Sans JP" charset="0"/>
+                        <a:ea typeface="Noto Sans JP" charset="0"/>
+                        <a:cs typeface="Noto Sans JP" charset="0"/>
+                      </a:endParaRPr>
+                    </a:p>
+                  </a:txBody>
+                  <a:tcPr marL="45720" marR="45720" marT="45720" marB="45720" anchor="ctr">
+                    <a:lnL w="6350" cap="flat" cmpd="sng" algn="ctr">
+                      <a:solidFill>
+                        <a:srgbClr val="D9D9D9"/>
+                      </a:solidFill>
+                      <a:prstDash val="solid"/>
+                      <a:round/>
+                      <a:headEnd type="none" w="med" len="med"/>
+                      <a:tailEnd type="none" w="med" len="med"/>
+                    </a:lnL>
+                    <a:lnR w="6350" cap="flat" cmpd="sng" algn="ctr">
+                      <a:solidFill>
+                        <a:srgbClr val="D9D9D9"/>
+                      </a:solidFill>
+                      <a:prstDash val="solid"/>
+                      <a:round/>
+                      <a:headEnd type="none" w="med" len="med"/>
+                      <a:tailEnd type="none" w="med" len="med"/>
+                    </a:lnR>
+                    <a:lnT w="6350" cap="flat" cmpd="sng" algn="ctr">
+                      <a:solidFill>
+                        <a:srgbClr val="D9D9D9"/>
+                      </a:solidFill>
+                      <a:prstDash val="solid"/>
+                      <a:round/>
+                      <a:headEnd type="none" w="med" len="med"/>
+                      <a:tailEnd type="none" w="med" len="med"/>
+                    </a:lnT>
+                    <a:lnB w="6350" cap="flat" cmpd="sng" algn="ctr">
+                      <a:solidFill>
+                        <a:srgbClr val="D9D9D9"/>
+                      </a:solidFill>
+                      <a:prstDash val="solid"/>
+                      <a:round/>
+                      <a:headEnd type="none" w="med" len="med"/>
+                      <a:tailEnd type="none" w="med" len="med"/>
+                    </a:lnB>
+                    <a:solidFill>
+                      <a:srgbClr val="F0F6FB"/>
+                    </a:solidFill>
+                  </a:tcPr>
+                </a:tc>
+                <a:tc>
+                  <a:txBody>
+                    <a:bodyPr/>
+                    <a:lstStyle/>
+                    <a:p>
+                      <a:pPr indent="0" marL="0">
+                        <a:buNone/>
+                      </a:pPr>
+                      <a:r>
+                        <a:rPr lang="en-US" sz="1000" dirty="0">
+                          <a:solidFill>
+                            <a:srgbClr val="262626"/>
+                          </a:solidFill>
+                          <a:latin typeface="Noto Sans JP" pitchFamily="34" charset="0"/>
+                          <a:ea typeface="Noto Sans JP" pitchFamily="34" charset="-122"/>
+                          <a:cs typeface="Noto Sans JP" pitchFamily="34" charset="-120"/>
+                        </a:rPr>
+                        <a:t>957</a:t>
+                      </a:r>
+                      <a:endParaRPr lang="en-US" sz="1000" dirty="0">
+                        <a:latin typeface="Noto Sans JP" charset="0"/>
+                        <a:ea typeface="Noto Sans JP" charset="0"/>
+                        <a:cs typeface="Noto Sans JP" charset="0"/>
+                      </a:endParaRPr>
+                    </a:p>
+                  </a:txBody>
+                  <a:tcPr marL="45720" marR="45720" marT="45720" marB="45720" anchor="ctr">
+                    <a:lnL w="6350" cap="flat" cmpd="sng" algn="ctr">
+                      <a:solidFill>
+                        <a:srgbClr val="D9D9D9"/>
+                      </a:solidFill>
+                      <a:prstDash val="solid"/>
+                      <a:round/>
+                      <a:headEnd type="none" w="med" len="med"/>
+                      <a:tailEnd type="none" w="med" len="med"/>
+                    </a:lnL>
+                    <a:lnR w="6350" cap="flat" cmpd="sng" algn="ctr">
+                      <a:solidFill>
+                        <a:srgbClr val="D9D9D9"/>
+                      </a:solidFill>
+                      <a:prstDash val="solid"/>
+                      <a:round/>
+                      <a:headEnd type="none" w="med" len="med"/>
+                      <a:tailEnd type="none" w="med" len="med"/>
+                    </a:lnR>
+                    <a:lnT w="6350" cap="flat" cmpd="sng" algn="ctr">
+                      <a:solidFill>
+                        <a:srgbClr val="D9D9D9"/>
+                      </a:solidFill>
+                      <a:prstDash val="solid"/>
+                      <a:round/>
+                      <a:headEnd type="none" w="med" len="med"/>
+                      <a:tailEnd type="none" w="med" len="med"/>
+                    </a:lnT>
+                    <a:lnB w="6350" cap="flat" cmpd="sng" algn="ctr">
+                      <a:solidFill>
+                        <a:srgbClr val="D9D9D9"/>
+                      </a:solidFill>
+                      <a:prstDash val="solid"/>
+                      <a:round/>
+                      <a:headEnd type="none" w="med" len="med"/>
+                      <a:tailEnd type="none" w="med" len="med"/>
+                    </a:lnB>
+                    <a:solidFill>
+                      <a:srgbClr val="F0F6FB"/>
+                    </a:solidFill>
+                  </a:tcPr>
+                </a:tc>
+                <a:tc>
+                  <a:txBody>
+                    <a:bodyPr/>
+                    <a:lstStyle/>
+                    <a:p>
+                      <a:pPr indent="0" marL="0">
+                        <a:buNone/>
+                      </a:pPr>
+                      <a:r>
+                        <a:rPr lang="en-US" sz="1000" dirty="0">
+                          <a:solidFill>
+                            <a:srgbClr val="262626"/>
+                          </a:solidFill>
+                          <a:latin typeface="Noto Sans JP" pitchFamily="34" charset="0"/>
+                          <a:ea typeface="Noto Sans JP" pitchFamily="34" charset="-122"/>
+                          <a:cs typeface="Noto Sans JP" pitchFamily="34" charset="-120"/>
+                        </a:rPr>
+                        <a:t>1,495</a:t>
+                      </a:r>
+                      <a:endParaRPr lang="en-US" sz="1000" dirty="0">
+                        <a:latin typeface="Noto Sans JP" charset="0"/>
+                        <a:ea typeface="Noto Sans JP" charset="0"/>
+                        <a:cs typeface="Noto Sans JP" charset="0"/>
+                      </a:endParaRPr>
+                    </a:p>
+                  </a:txBody>
+                  <a:tcPr marL="45720" marR="45720" marT="45720" marB="45720" anchor="ctr">
+                    <a:lnL w="6350" cap="flat" cmpd="sng" algn="ctr">
+                      <a:solidFill>
+                        <a:srgbClr val="D9D9D9"/>
+                      </a:solidFill>
+                      <a:prstDash val="solid"/>
+                      <a:round/>
+                      <a:headEnd type="none" w="med" len="med"/>
+                      <a:tailEnd type="none" w="med" len="med"/>
+                    </a:lnL>
+                    <a:lnR w="6350" cap="flat" cmpd="sng" algn="ctr">
+                      <a:solidFill>
+                        <a:srgbClr val="D9D9D9"/>
+                      </a:solidFill>
+                      <a:prstDash val="solid"/>
+                      <a:round/>
+                      <a:headEnd type="none" w="med" len="med"/>
+                      <a:tailEnd type="none" w="med" len="med"/>
+                    </a:lnR>
+                    <a:lnT w="6350" cap="flat" cmpd="sng" algn="ctr">
+                      <a:solidFill>
+                        <a:srgbClr val="D9D9D9"/>
+                      </a:solidFill>
+                      <a:prstDash val="solid"/>
+                      <a:round/>
+                      <a:headEnd type="none" w="med" len="med"/>
+                      <a:tailEnd type="none" w="med" len="med"/>
+                    </a:lnT>
+                    <a:lnB w="6350" cap="flat" cmpd="sng" algn="ctr">
+                      <a:solidFill>
+                        <a:srgbClr val="D9D9D9"/>
+                      </a:solidFill>
+                      <a:prstDash val="solid"/>
+                      <a:round/>
+                      <a:headEnd type="none" w="med" len="med"/>
+                      <a:tailEnd type="none" w="med" len="med"/>
+                    </a:lnB>
+                    <a:solidFill>
+                      <a:srgbClr val="F0F6FB"/>
+                    </a:solidFill>
+                  </a:tcPr>
+                </a:tc>
+              </a:tr>
+              <a:tr h="365760">
+                <a:tc>
+                  <a:txBody>
+                    <a:bodyPr/>
+                    <a:lstStyle/>
+                    <a:p>
+                      <a:pPr indent="0" marL="0">
+                        <a:buNone/>
+                      </a:pPr>
+                      <a:r>
+                        <a:rPr lang="en-US" sz="1000" dirty="0">
+                          <a:solidFill>
+                            <a:srgbClr val="262626"/>
+                          </a:solidFill>
+                          <a:latin typeface="Noto Sans JP" pitchFamily="34" charset="0"/>
+                          <a:ea typeface="Noto Sans JP" pitchFamily="34" charset="-122"/>
+                          <a:cs typeface="Noto Sans JP" pitchFamily="34" charset="-120"/>
+                        </a:rPr>
+                        <a:t>5%</a:t>
+                      </a:r>
+                      <a:endParaRPr lang="en-US" sz="1000" dirty="0">
+                        <a:latin typeface="Noto Sans JP" charset="0"/>
+                        <a:ea typeface="Noto Sans JP" charset="0"/>
+                        <a:cs typeface="Noto Sans JP" charset="0"/>
+                      </a:endParaRPr>
+                    </a:p>
+                  </a:txBody>
+                  <a:tcPr marL="45720" marR="45720" marT="45720" marB="45720" anchor="ctr">
+                    <a:lnL w="6350" cap="flat" cmpd="sng" algn="ctr">
+                      <a:solidFill>
+                        <a:srgbClr val="D9D9D9"/>
+                      </a:solidFill>
+                      <a:prstDash val="solid"/>
+                      <a:round/>
+                      <a:headEnd type="none" w="med" len="med"/>
+                      <a:tailEnd type="none" w="med" len="med"/>
+                    </a:lnL>
+                    <a:lnR w="6350" cap="flat" cmpd="sng" algn="ctr">
+                      <a:solidFill>
+                        <a:srgbClr val="D9D9D9"/>
+                      </a:solidFill>
+                      <a:prstDash val="solid"/>
+                      <a:round/>
+                      <a:headEnd type="none" w="med" len="med"/>
+                      <a:tailEnd type="none" w="med" len="med"/>
+                    </a:lnR>
+                    <a:lnT w="6350" cap="flat" cmpd="sng" algn="ctr">
+                      <a:solidFill>
+                        <a:srgbClr val="D9D9D9"/>
+                      </a:solidFill>
+                      <a:prstDash val="solid"/>
+                      <a:round/>
+                      <a:headEnd type="none" w="med" len="med"/>
+                      <a:tailEnd type="none" w="med" len="med"/>
+                    </a:lnT>
+                    <a:lnB w="6350" cap="flat" cmpd="sng" algn="ctr">
+                      <a:solidFill>
+                        <a:srgbClr val="D9D9D9"/>
+                      </a:solidFill>
+                      <a:prstDash val="solid"/>
+                      <a:round/>
+                      <a:headEnd type="none" w="med" len="med"/>
+                      <a:tailEnd type="none" w="med" len="med"/>
+                    </a:lnB>
+                    <a:solidFill>
+                      <a:srgbClr val="FFFFFF"/>
+                    </a:solidFill>
+                  </a:tcPr>
+                </a:tc>
+                <a:tc>
+                  <a:txBody>
+                    <a:bodyPr/>
+                    <a:lstStyle/>
+                    <a:p>
+                      <a:pPr indent="0" marL="0">
+                        <a:buNone/>
+                      </a:pPr>
+                      <a:r>
+                        <a:rPr lang="en-US" sz="1000" dirty="0">
+                          <a:solidFill>
+                            <a:srgbClr val="262626"/>
+                          </a:solidFill>
+                          <a:latin typeface="Noto Sans JP" pitchFamily="34" charset="0"/>
+                          <a:ea typeface="Noto Sans JP" pitchFamily="34" charset="-122"/>
+                          <a:cs typeface="Noto Sans JP" pitchFamily="34" charset="-120"/>
+                        </a:rPr>
+                        <a:t>1,594</a:t>
+                      </a:r>
+                      <a:endParaRPr lang="en-US" sz="1000" dirty="0">
+                        <a:latin typeface="Noto Sans JP" charset="0"/>
+                        <a:ea typeface="Noto Sans JP" charset="0"/>
+                        <a:cs typeface="Noto Sans JP" charset="0"/>
+                      </a:endParaRPr>
+                    </a:p>
+                  </a:txBody>
+                  <a:tcPr marL="45720" marR="45720" marT="45720" marB="45720" anchor="ctr">
+                    <a:lnL w="6350" cap="flat" cmpd="sng" algn="ctr">
+                      <a:solidFill>
+                        <a:srgbClr val="D9D9D9"/>
+                      </a:solidFill>
+                      <a:prstDash val="solid"/>
+                      <a:round/>
+                      <a:headEnd type="none" w="med" len="med"/>
+                      <a:tailEnd type="none" w="med" len="med"/>
+                    </a:lnL>
+                    <a:lnR w="6350" cap="flat" cmpd="sng" algn="ctr">
+                      <a:solidFill>
+                        <a:srgbClr val="D9D9D9"/>
+                      </a:solidFill>
+                      <a:prstDash val="solid"/>
+                      <a:round/>
+                      <a:headEnd type="none" w="med" len="med"/>
+                      <a:tailEnd type="none" w="med" len="med"/>
+                    </a:lnR>
+                    <a:lnT w="6350" cap="flat" cmpd="sng" algn="ctr">
+                      <a:solidFill>
+                        <a:srgbClr val="D9D9D9"/>
+                      </a:solidFill>
+                      <a:prstDash val="solid"/>
+                      <a:round/>
+                      <a:headEnd type="none" w="med" len="med"/>
+                      <a:tailEnd type="none" w="med" len="med"/>
+                    </a:lnT>
+                    <a:lnB w="6350" cap="flat" cmpd="sng" algn="ctr">
+                      <a:solidFill>
+                        <a:srgbClr val="D9D9D9"/>
+                      </a:solidFill>
+                      <a:prstDash val="solid"/>
+                      <a:round/>
+                      <a:headEnd type="none" w="med" len="med"/>
+                      <a:tailEnd type="none" w="med" len="med"/>
+                    </a:lnB>
+                    <a:solidFill>
+                      <a:srgbClr val="FFFFFF"/>
+                    </a:solidFill>
+                  </a:tcPr>
+                </a:tc>
+                <a:tc>
+                  <a:txBody>
+                    <a:bodyPr/>
+                    <a:lstStyle/>
+                    <a:p>
+                      <a:pPr indent="0" marL="0">
+                        <a:buNone/>
+                      </a:pPr>
+                      <a:r>
+                        <a:rPr lang="en-US" sz="1000" dirty="0">
+                          <a:solidFill>
+                            <a:srgbClr val="262626"/>
+                          </a:solidFill>
+                          <a:latin typeface="Noto Sans JP" pitchFamily="34" charset="0"/>
+                          <a:ea typeface="Noto Sans JP" pitchFamily="34" charset="-122"/>
+                          <a:cs typeface="Noto Sans JP" pitchFamily="34" charset="-120"/>
+                        </a:rPr>
+                        <a:t>2,491</a:t>
+                      </a:r>
+                      <a:endParaRPr lang="en-US" sz="1000" dirty="0">
+                        <a:latin typeface="Noto Sans JP" charset="0"/>
+                        <a:ea typeface="Noto Sans JP" charset="0"/>
+                        <a:cs typeface="Noto Sans JP" charset="0"/>
+                      </a:endParaRPr>
+                    </a:p>
+                  </a:txBody>
+                  <a:tcPr marL="45720" marR="45720" marT="45720" marB="45720" anchor="ctr">
+                    <a:lnL w="6350" cap="flat" cmpd="sng" algn="ctr">
+                      <a:solidFill>
+                        <a:srgbClr val="D9D9D9"/>
+                      </a:solidFill>
+                      <a:prstDash val="solid"/>
+                      <a:round/>
+                      <a:headEnd type="none" w="med" len="med"/>
+                      <a:tailEnd type="none" w="med" len="med"/>
+                    </a:lnL>
+                    <a:lnR w="6350" cap="flat" cmpd="sng" algn="ctr">
+                      <a:solidFill>
+                        <a:srgbClr val="D9D9D9"/>
+                      </a:solidFill>
+                      <a:prstDash val="solid"/>
+                      <a:round/>
+                      <a:headEnd type="none" w="med" len="med"/>
+                      <a:tailEnd type="none" w="med" len="med"/>
+                    </a:lnR>
+                    <a:lnT w="6350" cap="flat" cmpd="sng" algn="ctr">
+                      <a:solidFill>
+                        <a:srgbClr val="D9D9D9"/>
+                      </a:solidFill>
+                      <a:prstDash val="solid"/>
+                      <a:round/>
+                      <a:headEnd type="none" w="med" len="med"/>
+                      <a:tailEnd type="none" w="med" len="med"/>
+                    </a:lnT>
+                    <a:lnB w="6350" cap="flat" cmpd="sng" algn="ctr">
+                      <a:solidFill>
+                        <a:srgbClr val="D9D9D9"/>
+                      </a:solidFill>
+                      <a:prstDash val="solid"/>
+                      <a:round/>
+                      <a:headEnd type="none" w="med" len="med"/>
+                      <a:tailEnd type="none" w="med" len="med"/>
+                    </a:lnB>
+                    <a:solidFill>
+                      <a:srgbClr val="FFFFFF"/>
+                    </a:solidFill>
+                  </a:tcPr>
+                </a:tc>
+              </a:tr>
+              <a:tr h="365760">
+                <a:tc>
+                  <a:txBody>
+                    <a:bodyPr/>
+                    <a:lstStyle/>
+                    <a:p>
+                      <a:pPr indent="0" marL="0">
+                        <a:buNone/>
+                      </a:pPr>
+                      <a:r>
+                        <a:rPr lang="en-US" sz="1000" b="1" dirty="0">
+                          <a:solidFill>
+                            <a:srgbClr val="262626"/>
+                          </a:solidFill>
+                          <a:latin typeface="Noto Sans JP" pitchFamily="34" charset="0"/>
+                          <a:ea typeface="Noto Sans JP" pitchFamily="34" charset="-122"/>
+                          <a:cs typeface="Noto Sans JP" pitchFamily="34" charset="-120"/>
+                        </a:rPr>
+                        <a:t>8%（九州太陽光並み）</a:t>
+                      </a:r>
+                      <a:endParaRPr lang="en-US" sz="1000" dirty="0">
+                        <a:latin typeface="Noto Sans JP" charset="0"/>
+                        <a:ea typeface="Noto Sans JP" charset="0"/>
+                        <a:cs typeface="Noto Sans JP" charset="0"/>
+                      </a:endParaRPr>
+                    </a:p>
+                  </a:txBody>
+                  <a:tcPr marL="45720" marR="45720" marT="45720" marB="45720" anchor="ctr">
+                    <a:lnL w="6350" cap="flat" cmpd="sng" algn="ctr">
+                      <a:solidFill>
+                        <a:srgbClr val="D9D9D9"/>
+                      </a:solidFill>
+                      <a:prstDash val="solid"/>
+                      <a:round/>
+                      <a:headEnd type="none" w="med" len="med"/>
+                      <a:tailEnd type="none" w="med" len="med"/>
+                    </a:lnL>
+                    <a:lnR w="6350" cap="flat" cmpd="sng" algn="ctr">
+                      <a:solidFill>
+                        <a:srgbClr val="D9D9D9"/>
+                      </a:solidFill>
+                      <a:prstDash val="solid"/>
+                      <a:round/>
+                      <a:headEnd type="none" w="med" len="med"/>
+                      <a:tailEnd type="none" w="med" len="med"/>
+                    </a:lnR>
+                    <a:lnT w="6350" cap="flat" cmpd="sng" algn="ctr">
+                      <a:solidFill>
+                        <a:srgbClr val="D9D9D9"/>
+                      </a:solidFill>
+                      <a:prstDash val="solid"/>
+                      <a:round/>
+                      <a:headEnd type="none" w="med" len="med"/>
+                      <a:tailEnd type="none" w="med" len="med"/>
+                    </a:lnT>
+                    <a:lnB w="6350" cap="flat" cmpd="sng" algn="ctr">
+                      <a:solidFill>
+                        <a:srgbClr val="D9D9D9"/>
+                      </a:solidFill>
+                      <a:prstDash val="solid"/>
+                      <a:round/>
+                      <a:headEnd type="none" w="med" len="med"/>
+                      <a:tailEnd type="none" w="med" len="med"/>
+                    </a:lnB>
+                    <a:solidFill>
+                      <a:srgbClr val="F0F6FB"/>
+                    </a:solidFill>
+                  </a:tcPr>
+                </a:tc>
+                <a:tc>
+                  <a:txBody>
+                    <a:bodyPr/>
+                    <a:lstStyle/>
+                    <a:p>
+                      <a:pPr indent="0" marL="0">
+                        <a:buNone/>
+                      </a:pPr>
+                      <a:r>
+                        <a:rPr lang="en-US" sz="1000" b="1" dirty="0">
+                          <a:solidFill>
+                            <a:srgbClr val="D95B20"/>
+                          </a:solidFill>
+                          <a:latin typeface="Noto Sans JP" pitchFamily="34" charset="0"/>
+                          <a:ea typeface="Noto Sans JP" pitchFamily="34" charset="-122"/>
+                          <a:cs typeface="Noto Sans JP" pitchFamily="34" charset="-120"/>
+                        </a:rPr>
+                        <a:t>2,551</a:t>
+                      </a:r>
+                      <a:endParaRPr lang="en-US" sz="1000" dirty="0">
+                        <a:latin typeface="Noto Sans JP" charset="0"/>
+                        <a:ea typeface="Noto Sans JP" charset="0"/>
+                        <a:cs typeface="Noto Sans JP" charset="0"/>
+                      </a:endParaRPr>
+                    </a:p>
+                  </a:txBody>
+                  <a:tcPr marL="45720" marR="45720" marT="45720" marB="45720" anchor="ctr">
+                    <a:lnL w="6350" cap="flat" cmpd="sng" algn="ctr">
+                      <a:solidFill>
+                        <a:srgbClr val="D9D9D9"/>
+                      </a:solidFill>
+                      <a:prstDash val="solid"/>
+                      <a:round/>
+                      <a:headEnd type="none" w="med" len="med"/>
+                      <a:tailEnd type="none" w="med" len="med"/>
+                    </a:lnL>
+                    <a:lnR w="6350" cap="flat" cmpd="sng" algn="ctr">
+                      <a:solidFill>
+                        <a:srgbClr val="D9D9D9"/>
+                      </a:solidFill>
+                      <a:prstDash val="solid"/>
+                      <a:round/>
+                      <a:headEnd type="none" w="med" len="med"/>
+                      <a:tailEnd type="none" w="med" len="med"/>
+                    </a:lnR>
+                    <a:lnT w="6350" cap="flat" cmpd="sng" algn="ctr">
+                      <a:solidFill>
+                        <a:srgbClr val="D9D9D9"/>
+                      </a:solidFill>
+                      <a:prstDash val="solid"/>
+                      <a:round/>
+                      <a:headEnd type="none" w="med" len="med"/>
+                      <a:tailEnd type="none" w="med" len="med"/>
+                    </a:lnT>
+                    <a:lnB w="6350" cap="flat" cmpd="sng" algn="ctr">
+                      <a:solidFill>
+                        <a:srgbClr val="D9D9D9"/>
+                      </a:solidFill>
+                      <a:prstDash val="solid"/>
+                      <a:round/>
+                      <a:headEnd type="none" w="med" len="med"/>
+                      <a:tailEnd type="none" w="med" len="med"/>
+                    </a:lnB>
+                    <a:solidFill>
+                      <a:srgbClr val="F0F6FB"/>
+                    </a:solidFill>
+                  </a:tcPr>
+                </a:tc>
+                <a:tc>
+                  <a:txBody>
+                    <a:bodyPr/>
+                    <a:lstStyle/>
+                    <a:p>
+                      <a:pPr indent="0" marL="0">
+                        <a:buNone/>
+                      </a:pPr>
+                      <a:r>
+                        <a:rPr lang="en-US" sz="1000" b="1" dirty="0">
+                          <a:solidFill>
+                            <a:srgbClr val="D95B20"/>
+                          </a:solidFill>
+                          <a:latin typeface="Noto Sans JP" pitchFamily="34" charset="0"/>
+                          <a:ea typeface="Noto Sans JP" pitchFamily="34" charset="-122"/>
+                          <a:cs typeface="Noto Sans JP" pitchFamily="34" charset="-120"/>
+                        </a:rPr>
+                        <a:t>3,986円/kWh-年</a:t>
+                      </a:r>
+                      <a:endParaRPr lang="en-US" sz="1000" dirty="0">
+                        <a:latin typeface="Noto Sans JP" charset="0"/>
+                        <a:ea typeface="Noto Sans JP" charset="0"/>
+                        <a:cs typeface="Noto Sans JP" charset="0"/>
+                      </a:endParaRPr>
+                    </a:p>
+                  </a:txBody>
+                  <a:tcPr marL="45720" marR="45720" marT="45720" marB="45720" anchor="ctr">
+                    <a:lnL w="6350" cap="flat" cmpd="sng" algn="ctr">
+                      <a:solidFill>
+                        <a:srgbClr val="D9D9D9"/>
+                      </a:solidFill>
+                      <a:prstDash val="solid"/>
+                      <a:round/>
+                      <a:headEnd type="none" w="med" len="med"/>
+                      <a:tailEnd type="none" w="med" len="med"/>
+                    </a:lnL>
+                    <a:lnR w="6350" cap="flat" cmpd="sng" algn="ctr">
+                      <a:solidFill>
+                        <a:srgbClr val="D9D9D9"/>
+                      </a:solidFill>
+                      <a:prstDash val="solid"/>
+                      <a:round/>
+                      <a:headEnd type="none" w="med" len="med"/>
+                      <a:tailEnd type="none" w="med" len="med"/>
+                    </a:lnR>
+                    <a:lnT w="6350" cap="flat" cmpd="sng" algn="ctr">
+                      <a:solidFill>
+                        <a:srgbClr val="D9D9D9"/>
+                      </a:solidFill>
+                      <a:prstDash val="solid"/>
+                      <a:round/>
+                      <a:headEnd type="none" w="med" len="med"/>
+                      <a:tailEnd type="none" w="med" len="med"/>
+                    </a:lnT>
+                    <a:lnB w="6350" cap="flat" cmpd="sng" algn="ctr">
+                      <a:solidFill>
+                        <a:srgbClr val="D9D9D9"/>
+                      </a:solidFill>
+                      <a:prstDash val="solid"/>
+                      <a:round/>
+                      <a:headEnd type="none" w="med" len="med"/>
+                      <a:tailEnd type="none" w="med" len="med"/>
+                    </a:lnB>
+                    <a:solidFill>
+                      <a:srgbClr val="F0F6FB"/>
+                    </a:solidFill>
+                  </a:tcPr>
+                </a:tc>
+              </a:tr>
+            </a:tbl>
+          </a:graphicData>
+        </a:graphic>
+      </p:graphicFrame>
+      <p:sp>
+        <p:nvSpPr>
+          <p:cNvPr id="16" name="Text 11"/>
+          <p:cNvSpPr/>
+          <p:nvPr/>
+        </p:nvSpPr>
+        <p:spPr>
+          <a:xfrm>
+            <a:off x="6858000" y="3749040"/>
+            <a:ext cx="4782312" cy="1554480"/>
+          </a:xfrm>
+          <a:prstGeom prst="rect">
+            <a:avLst/>
+          </a:prstGeom>
+          <a:noFill/>
+          <a:ln/>
+        </p:spPr>
+        <p:txBody>
+          <a:bodyPr wrap="square" lIns="0" tIns="0" rIns="0" bIns="0" rtlCol="0" anchor="t"/>
+          <a:lstStyle/>
+          <a:p>
+            <a:pPr lvl="1" marL="254000" indent="-127000">
+              <a:lnSpc>
+                <a:spcPct val="120000"/>
+              </a:lnSpc>
+              <a:spcAft>
+                <a:spcPts val="500"/>
+              </a:spcAft>
+              <a:buSzPct val="100000"/>
+              <a:buChar char="–"/>
+            </a:pPr>
+            <a:r>
+              <a:rPr lang="en-US" sz="1000" dirty="0">
+                <a:solidFill>
+                  <a:srgbClr val="262626"/>
+                </a:solidFill>
+                <a:latin typeface="Noto Sans JP" pitchFamily="34" charset="0"/>
+                <a:ea typeface="Noto Sans JP" pitchFamily="34" charset="-122"/>
+                <a:cs typeface="Noto Sans JP" pitchFamily="34" charset="-120"/>
+              </a:rPr>
+              <a:t>現状は蓄電池実勢6.8万円/kWhの年0.7%相当と小さいが、九州並み8%で年4%相当に。全量回収仮定の上限値（容量0.64kWh/kW制約で実効は下がる）</a:t>
+            </a:r>
+            <a:endParaRPr lang="en-US" sz="1000" dirty="0"/>
+          </a:p>
+          <a:p>
+            <a:pPr lvl="1" marL="254000" indent="-127000">
+              <a:lnSpc>
+                <a:spcPct val="120000"/>
+              </a:lnSpc>
+              <a:spcAft>
+                <a:spcPts val="500"/>
+              </a:spcAft>
+              <a:buSzPct val="100000"/>
+              <a:buChar char="–"/>
+            </a:pPr>
+            <a:r>
+              <a:rPr lang="en-US" sz="1000" dirty="0">
+                <a:solidFill>
+                  <a:srgbClr val="262626"/>
+                </a:solidFill>
+                <a:latin typeface="Noto Sans JP" pitchFamily="34" charset="0"/>
+                <a:ea typeface="Noto Sans JP" pitchFamily="34" charset="-122"/>
+                <a:cs typeface="Noto Sans JP" pitchFamily="34" charset="-120"/>
+              </a:rPr>
+              <a:t>北海道は2015年から風力への蓄電池併設要件を課した先駆エリア — 制度は既にこの価値を織り込みに行っている</a:t>
+            </a:r>
+            <a:endParaRPr lang="en-US" sz="1000" dirty="0"/>
+          </a:p>
+        </p:txBody>
+      </p:sp>
+      <p:sp>
+        <p:nvSpPr>
+          <p:cNvPr id="17" name="Shape 12"/>
+          <p:cNvSpPr/>
+          <p:nvPr/>
+        </p:nvSpPr>
+        <p:spPr>
+          <a:xfrm>
+            <a:off x="548640" y="5669280"/>
+            <a:ext cx="11091672" cy="621792"/>
+          </a:xfrm>
+          <a:prstGeom prst="rect">
+            <a:avLst/>
+          </a:prstGeom>
+          <a:solidFill>
+            <a:srgbClr val="F0F6FB"/>
+          </a:solidFill>
+          <a:ln/>
+        </p:spPr>
+      </p:sp>
+      <p:sp>
+        <p:nvSpPr>
+          <p:cNvPr id="18" name="Text 13"/>
+          <p:cNvSpPr/>
+          <p:nvPr/>
+        </p:nvSpPr>
+        <p:spPr>
+          <a:xfrm>
+            <a:off x="777240" y="5669280"/>
+            <a:ext cx="10607040" cy="621792"/>
+          </a:xfrm>
+          <a:prstGeom prst="rect">
+            <a:avLst/>
+          </a:prstGeom>
+          <a:noFill/>
+          <a:ln/>
+        </p:spPr>
+        <p:txBody>
+          <a:bodyPr wrap="square" lIns="0" tIns="0" rIns="0" bIns="0" rtlCol="0" anchor="ctr"/>
+          <a:lstStyle/>
+          <a:p>
+            <a:pPr indent="0" marL="0">
+              <a:lnSpc>
+                <a:spcPct val="120000"/>
+              </a:lnSpc>
+              <a:buNone/>
+            </a:pPr>
+            <a:r>
+              <a:rPr lang="en-US" sz="1000" b="1" dirty="0">
+                <a:solidFill>
+                  <a:srgbClr val="176871"/>
+                </a:solidFill>
+                <a:latin typeface="Noto Sans JP" pitchFamily="34" charset="0"/>
+                <a:ea typeface="Noto Sans JP" pitchFamily="34" charset="-122"/>
+                <a:cs typeface="Noto Sans JP" pitchFamily="34" charset="-120"/>
+              </a:rPr>
+              <a:t>定式化: </a:t>
+            </a:r>
+            <a:pPr indent="0" marL="0">
+              <a:lnSpc>
+                <a:spcPct val="120000"/>
+              </a:lnSpc>
+              <a:buNone/>
+            </a:pPr>
+            <a:r>
+              <a:rPr lang="en-US" sz="1000" dirty="0">
+                <a:solidFill>
+                  <a:srgbClr val="262626"/>
+                </a:solidFill>
+                <a:latin typeface="Noto Sans JP" pitchFamily="34" charset="0"/>
+                <a:ea typeface="Noto Sans JP" pitchFamily="34" charset="-122"/>
+                <a:cs typeface="Noto Sans JP" pitchFamily="34" charset="-120"/>
+              </a:rPr>
+              <a:t>π ＝ ①エリア価格裁定（FTM/BTM共通） ＋ ②ローカル抑制回避（BTM固有・価格に不可視） ＋ ③容量市場等。K*主結果は従来どおりFTM（①＋③）で立て、BTMは政策層→抑制率上昇とともに内生参入条件 π_BTM≥c_req_BTM を別建て</a:t>
+            </a:r>
+            <a:endParaRPr lang="en-US" sz="1000" dirty="0"/>
+          </a:p>
+        </p:txBody>
+      </p:sp>
+      <p:sp>
+        <p:nvSpPr>
+          <p:cNvPr id="19" name="Text 14"/>
+          <p:cNvSpPr/>
+          <p:nvPr/>
+        </p:nvSpPr>
+        <p:spPr>
+          <a:xfrm>
+            <a:off x="548640" y="6355080"/>
+            <a:ext cx="8229600" cy="274320"/>
+          </a:xfrm>
+          <a:prstGeom prst="rect">
+            <a:avLst/>
+          </a:prstGeom>
+          <a:noFill/>
+          <a:ln/>
+        </p:spPr>
+        <p:txBody>
+          <a:bodyPr wrap="square" lIns="0" tIns="0" rIns="0" bIns="0" rtlCol="0" anchor="ctr"/>
+          <a:lstStyle/>
+          <a:p>
+            <a:pPr indent="0" marL="0">
+              <a:buNone/>
+            </a:pPr>
+            <a:r>
+              <a:rPr lang="en-US" sz="850" dirty="0">
+                <a:solidFill>
+                  <a:srgbClr val="595959"/>
+                </a:solidFill>
+                <a:latin typeface="Noto Sans JP" pitchFamily="34" charset="0"/>
+                <a:ea typeface="Noto Sans JP" pitchFamily="34" charset="-122"/>
+                <a:cs typeface="Noto Sans JP" pitchFamily="34" charset="-120"/>
+              </a:rPr>
+              <a:t>分析: analysis/20。データ: 別添Excel「併設BTM検討」・図 btm_case.png</a:t>
+            </a:r>
+            <a:endParaRPr lang="en-US" sz="850" dirty="0"/>
+          </a:p>
+        </p:txBody>
+      </p:sp>
+    </p:spTree>
+  </p:cSld>
+  <p:clrMapOvr>
+    <a:masterClrMapping/>
+  </p:clrMapOvr>
+</p:sld>
+</file>
+
+<file path=ppt/slides/slide12.xml><?xml version="1.0" encoding="utf-8"?>
+<p:sld xmlns:a="http://schemas.openxmlformats.org/drawingml/2006/main" xmlns:r="http://schemas.openxmlformats.org/officeDocument/2006/relationships" xmlns:p="http://schemas.openxmlformats.org/presentationml/2006/main">
+  <p:cSld name="Slide 12">
+    <p:bg>
+      <p:bgPr>
+        <a:solidFill>
+          <a:srgbClr val="FFFFFF"/>
+        </a:solidFill>
+      </p:bgPr>
+    </p:bg>
+    <p:spTree>
+      <p:nvGrpSpPr>
+        <p:cNvPr id="1" name=""/>
+        <p:cNvGrpSpPr/>
+        <p:nvPr/>
+      </p:nvGrpSpPr>
+      <p:grpSpPr>
+        <a:xfrm>
+          <a:off x="0" y="0"/>
+          <a:ext cx="0" cy="0"/>
+          <a:chOff x="0" y="0"/>
+          <a:chExt cx="0" cy="0"/>
+        </a:xfrm>
+      </p:grpSpPr>
+      <p:sp>
+        <p:nvSpPr>
+          <p:cNvPr id="2" name="Text 0"/>
+          <p:cNvSpPr/>
+          <p:nvPr/>
+        </p:nvSpPr>
+        <p:spPr>
+          <a:xfrm>
+            <a:off x="11567160" y="6355080"/>
+            <a:ext cx="429768" cy="228600"/>
+          </a:xfrm>
+          <a:prstGeom prst="rect">
+            <a:avLst/>
+          </a:prstGeom>
+          <a:noFill/>
+          <a:ln/>
+        </p:spPr>
+        <p:txBody>
+          <a:bodyPr wrap="square" lIns="0" tIns="0" rIns="0" bIns="0" rtlCol="0" anchor="ctr"/>
+          <a:lstStyle/>
+          <a:p>
+            <a:pPr algn="r" indent="0" marL="0">
+              <a:buNone/>
+            </a:pPr>
+            <a:r>
+              <a:rPr lang="en-US" sz="900" dirty="0">
+                <a:solidFill>
+                  <a:srgbClr val="595959"/>
+                </a:solidFill>
+                <a:latin typeface="Noto Sans JP" pitchFamily="34" charset="0"/>
+                <a:ea typeface="Noto Sans JP" pitchFamily="34" charset="-122"/>
+                <a:cs typeface="Noto Sans JP" pitchFamily="34" charset="-120"/>
+              </a:rPr>
+              <a:t>12</a:t>
+            </a:r>
+            <a:endParaRPr lang="en-US" sz="900" dirty="0"/>
+          </a:p>
+        </p:txBody>
+      </p:sp>
+      <p:sp>
+        <p:nvSpPr>
+          <p:cNvPr id="3" name="Text 1"/>
+          <p:cNvSpPr/>
+          <p:nvPr/>
+        </p:nvSpPr>
+        <p:spPr>
+          <a:xfrm>
+            <a:off x="338328" y="219456"/>
+            <a:ext cx="11521440" cy="384048"/>
+          </a:xfrm>
+          <a:prstGeom prst="rect">
+            <a:avLst/>
+          </a:prstGeom>
+          <a:noFill/>
+          <a:ln/>
+        </p:spPr>
+        <p:txBody>
+          <a:bodyPr wrap="square" lIns="0" tIns="0" rIns="0" bIns="0" rtlCol="0" anchor="ctr"/>
+          <a:lstStyle/>
+          <a:p>
+            <a:pPr indent="0" marL="0">
+              <a:buNone/>
+            </a:pPr>
+            <a:r>
+              <a:rPr lang="en-US" sz="1900" b="1" dirty="0">
+                <a:solidFill>
+                  <a:srgbClr val="000000"/>
+                </a:solidFill>
+                <a:latin typeface="Noto Sans JP SemiBold" pitchFamily="34" charset="0"/>
+                <a:ea typeface="Noto Sans JP SemiBold" pitchFamily="34" charset="-122"/>
+                <a:cs typeface="Noto Sans JP SemiBold" pitchFamily="34" charset="-120"/>
+              </a:rPr>
               <a:t>今後の方針 — 「風力×蓄電池の均衡容量K*」へ</a:t>
             </a:r>
             <a:endParaRPr lang="en-US" sz="1900" dirty="0"/>
@@ -5938,7 +9565,7 @@
         <p:spPr>
           <a:xfrm>
             <a:off x="6766560" y="1783080"/>
-            <a:ext cx="4873752" cy="1170432"/>
+            <a:ext cx="4873752" cy="914400"/>
           </a:xfrm>
           <a:prstGeom prst="rect">
             <a:avLst/>
@@ -5957,8 +9584,8 @@
         </p:nvSpPr>
         <p:spPr>
           <a:xfrm>
-            <a:off x="6967728" y="1874520"/>
-            <a:ext cx="4480560" cy="320040"/>
+            <a:off x="6967728" y="1847088"/>
+            <a:ext cx="4480560" cy="292608"/>
           </a:xfrm>
           <a:prstGeom prst="rect">
             <a:avLst/>
@@ -5974,7 +9601,7 @@
               <a:buNone/>
             </a:pPr>
             <a:r>
-              <a:rPr lang="en-US" sz="1150" b="1" dirty="0">
+              <a:rPr lang="en-US" sz="1050" b="1" dirty="0">
                 <a:solidFill>
                   <a:srgbClr val="176871"/>
                 </a:solidFill>
@@ -5982,9 +9609,9 @@
                 <a:ea typeface="Noto Sans JP SemiBold" pitchFamily="34" charset="-122"/>
                 <a:cs typeface="Noto Sans JP SemiBold" pitchFamily="34" charset="-120"/>
               </a:rPr>
-              <a:t>フェーズC</a:t>
+              <a:t>フェーズC（主線）</a:t>
             </a:r>
-            <a:endParaRPr lang="en-US" sz="1150" dirty="0"/>
+            <a:endParaRPr lang="en-US" sz="1050" dirty="0"/>
           </a:p>
         </p:txBody>
       </p:sp>
@@ -5996,8 +9623,8 @@
         </p:nvSpPr>
         <p:spPr>
           <a:xfrm>
-            <a:off x="6967728" y="2194560"/>
-            <a:ext cx="4480560" cy="731520"/>
+            <a:off x="6967728" y="2130552"/>
+            <a:ext cx="4480560" cy="548640"/>
           </a:xfrm>
           <a:prstGeom prst="rect">
             <a:avLst/>
@@ -6011,12 +9638,12 @@
           <a:p>
             <a:pPr indent="0" marL="0">
               <a:lnSpc>
-                <a:spcPct val="120000"/>
+                <a:spcPct val="115000"/>
               </a:lnSpc>
               <a:buNone/>
             </a:pPr>
             <a:r>
-              <a:rPr lang="en-US" sz="950" dirty="0">
+              <a:rPr lang="en-US" sz="880" dirty="0">
                 <a:solidFill>
                   <a:srgbClr val="262626"/>
                 </a:solidFill>
@@ -6026,7 +9653,7 @@
               </a:rPr>
               <a:t>蓄電池フリートの充放電をnetに内生化 → π(K)曲線 → K*初回推計（充電側の託送・賦課金も控除）</a:t>
             </a:r>
-            <a:endParaRPr lang="en-US" sz="950" dirty="0"/>
+            <a:endParaRPr lang="en-US" sz="880" dirty="0"/>
           </a:p>
         </p:txBody>
       </p:sp>
@@ -6038,8 +9665,8 @@
         </p:nvSpPr>
         <p:spPr>
           <a:xfrm>
-            <a:off x="6766560" y="3081528"/>
-            <a:ext cx="4873752" cy="1170432"/>
+            <a:off x="6766560" y="2816352"/>
+            <a:ext cx="4873752" cy="914400"/>
           </a:xfrm>
           <a:prstGeom prst="rect">
             <a:avLst/>
@@ -6058,8 +9685,8 @@
         </p:nvSpPr>
         <p:spPr>
           <a:xfrm>
-            <a:off x="6967728" y="3172968"/>
-            <a:ext cx="4480560" cy="320040"/>
+            <a:off x="6967728" y="2880360"/>
+            <a:ext cx="4480560" cy="292608"/>
           </a:xfrm>
           <a:prstGeom prst="rect">
             <a:avLst/>
@@ -6075,7 +9702,7 @@
               <a:buNone/>
             </a:pPr>
             <a:r>
-              <a:rPr lang="en-US" sz="1150" b="1" dirty="0">
+              <a:rPr lang="en-US" sz="1050" b="1" dirty="0">
                 <a:solidFill>
                   <a:srgbClr val="176871"/>
                 </a:solidFill>
@@ -6085,7 +9712,7 @@
               </a:rPr>
               <a:t>K_wind×K格子</a:t>
             </a:r>
-            <a:endParaRPr lang="en-US" sz="1150" dirty="0"/>
+            <a:endParaRPr lang="en-US" sz="1050" dirty="0"/>
           </a:p>
         </p:txBody>
       </p:sp>
@@ -6097,8 +9724,8 @@
         </p:nvSpPr>
         <p:spPr>
           <a:xfrm>
-            <a:off x="6967728" y="3493008"/>
-            <a:ext cx="4480560" cy="731520"/>
+            <a:off x="6967728" y="3163824"/>
+            <a:ext cx="4480560" cy="548640"/>
           </a:xfrm>
           <a:prstGeom prst="rect">
             <a:avLst/>
@@ -6112,12 +9739,12 @@
           <a:p>
             <a:pPr indent="0" marL="0">
               <a:lnSpc>
-                <a:spcPct val="120000"/>
+                <a:spcPct val="115000"/>
               </a:lnSpc>
               <a:buNone/>
             </a:pPr>
             <a:r>
-              <a:rPr lang="en-US" sz="950" dirty="0">
+              <a:rPr lang="en-US" sz="880" dirty="0">
                 <a:solidFill>
                   <a:srgbClr val="262626"/>
                 </a:solidFill>
@@ -6127,7 +9754,7 @@
               </a:rPr>
               <a:t>スイープを2次元化: 風力導入量×蓄電池容量の価値サーフェス＝「風力何万kWにつき蓄電池何万kWが均衡か」</a:t>
             </a:r>
-            <a:endParaRPr lang="en-US" sz="950" dirty="0"/>
+            <a:endParaRPr lang="en-US" sz="880" dirty="0"/>
           </a:p>
         </p:txBody>
       </p:sp>
@@ -6139,8 +9766,8 @@
         </p:nvSpPr>
         <p:spPr>
           <a:xfrm>
-            <a:off x="6766560" y="4379976"/>
-            <a:ext cx="4873752" cy="1170432"/>
+            <a:off x="6766560" y="3849624"/>
+            <a:ext cx="4873752" cy="914400"/>
           </a:xfrm>
           <a:prstGeom prst="rect">
             <a:avLst/>
@@ -6159,8 +9786,8 @@
         </p:nvSpPr>
         <p:spPr>
           <a:xfrm>
-            <a:off x="6967728" y="4471416"/>
-            <a:ext cx="4480560" cy="320040"/>
+            <a:off x="6967728" y="3913632"/>
+            <a:ext cx="4480560" cy="292608"/>
           </a:xfrm>
           <a:prstGeom prst="rect">
             <a:avLst/>
@@ -6176,7 +9803,7 @@
               <a:buNone/>
             </a:pPr>
             <a:r>
-              <a:rPr lang="en-US" sz="1150" b="1" dirty="0">
+              <a:rPr lang="en-US" sz="1050" b="1" dirty="0">
                 <a:solidFill>
                   <a:srgbClr val="176871"/>
                 </a:solidFill>
@@ -6184,9 +9811,9 @@
                 <a:ea typeface="Noto Sans JP SemiBold" pitchFamily="34" charset="-122"/>
                 <a:cs typeface="Noto Sans JP SemiBold" pitchFamily="34" charset="-120"/>
               </a:rPr>
-              <a:t>検証</a:t>
+              <a:t>BTM分析（フェーズCの副産物として）</a:t>
             </a:r>
-            <a:endParaRPr lang="en-US" sz="1150" dirty="0"/>
+            <a:endParaRPr lang="en-US" sz="1050" dirty="0"/>
           </a:p>
         </p:txBody>
       </p:sp>
@@ -6198,8 +9825,8 @@
         </p:nvSpPr>
         <p:spPr>
           <a:xfrm>
-            <a:off x="6967728" y="4791456"/>
-            <a:ext cx="4480560" cy="731520"/>
+            <a:off x="6967728" y="4197096"/>
+            <a:ext cx="4480560" cy="548640"/>
           </a:xfrm>
           <a:prstGeom prst="rect">
             <a:avLst/>
@@ -6213,12 +9840,113 @@
           <a:p>
             <a:pPr indent="0" marL="0">
               <a:lnSpc>
-                <a:spcPct val="120000"/>
+                <a:spcPct val="115000"/>
               </a:lnSpc>
               <a:buNone/>
             </a:pPr>
             <a:r>
-              <a:rPr lang="en-US" sz="950" dirty="0">
+              <a:rPr lang="en-US" sz="880" dirty="0">
+                <a:solidFill>
+                  <a:srgbClr val="262626"/>
+                </a:solidFill>
+                <a:latin typeface="Noto Sans JP" pitchFamily="34" charset="0"/>
+                <a:ea typeface="Noto Sans JP" pitchFamily="34" charset="-122"/>
+                <a:cs typeface="Noto Sans JP" pitchFamily="34" charset="-120"/>
+              </a:rPr>
+              <a:t>抑制イベントの分解（エリア余剰型/ローカル型）→ 0.64kWh/kW容量制約下の回避可能率 → π_BTM参入条件。系統別抑制実績の取得（DLリストC5）</a:t>
+            </a:r>
+            <a:endParaRPr lang="en-US" sz="880" dirty="0"/>
+          </a:p>
+        </p:txBody>
+      </p:sp>
+      <p:sp>
+        <p:nvSpPr>
+          <p:cNvPr id="20" name="Shape 18"/>
+          <p:cNvSpPr/>
+          <p:nvPr/>
+        </p:nvSpPr>
+        <p:spPr>
+          <a:xfrm>
+            <a:off x="6766560" y="4882896"/>
+            <a:ext cx="4873752" cy="914400"/>
+          </a:xfrm>
+          <a:prstGeom prst="rect">
+            <a:avLst/>
+          </a:prstGeom>
+          <a:solidFill>
+            <a:srgbClr val="F0F6FB"/>
+          </a:solidFill>
+          <a:ln/>
+        </p:spPr>
+      </p:sp>
+      <p:sp>
+        <p:nvSpPr>
+          <p:cNvPr id="21" name="Text 19"/>
+          <p:cNvSpPr/>
+          <p:nvPr/>
+        </p:nvSpPr>
+        <p:spPr>
+          <a:xfrm>
+            <a:off x="6967728" y="4946904"/>
+            <a:ext cx="4480560" cy="292608"/>
+          </a:xfrm>
+          <a:prstGeom prst="rect">
+            <a:avLst/>
+          </a:prstGeom>
+          <a:noFill/>
+          <a:ln/>
+        </p:spPr>
+        <p:txBody>
+          <a:bodyPr wrap="square" lIns="0" tIns="0" rIns="0" bIns="0" rtlCol="0" anchor="ctr"/>
+          <a:lstStyle/>
+          <a:p>
+            <a:pPr indent="0" marL="0">
+              <a:buNone/>
+            </a:pPr>
+            <a:r>
+              <a:rPr lang="en-US" sz="1050" b="1" dirty="0">
+                <a:solidFill>
+                  <a:srgbClr val="176871"/>
+                </a:solidFill>
+                <a:latin typeface="Noto Sans JP SemiBold" pitchFamily="34" charset="0"/>
+                <a:ea typeface="Noto Sans JP SemiBold" pitchFamily="34" charset="-122"/>
+                <a:cs typeface="Noto Sans JP SemiBold" pitchFamily="34" charset="-120"/>
+              </a:rPr>
+              <a:t>検証</a:t>
+            </a:r>
+            <a:endParaRPr lang="en-US" sz="1050" dirty="0"/>
+          </a:p>
+        </p:txBody>
+      </p:sp>
+      <p:sp>
+        <p:nvSpPr>
+          <p:cNvPr id="22" name="Text 20"/>
+          <p:cNvSpPr/>
+          <p:nvPr/>
+        </p:nvSpPr>
+        <p:spPr>
+          <a:xfrm>
+            <a:off x="6967728" y="5230368"/>
+            <a:ext cx="4480560" cy="548640"/>
+          </a:xfrm>
+          <a:prstGeom prst="rect">
+            <a:avLst/>
+          </a:prstGeom>
+          <a:noFill/>
+          <a:ln/>
+        </p:spPr>
+        <p:txBody>
+          <a:bodyPr wrap="square" lIns="0" tIns="0" rIns="0" bIns="0" rtlCol="0" anchor="ctr"/>
+          <a:lstStyle/>
+          <a:p>
+            <a:pPr indent="0" marL="0">
+              <a:lnSpc>
+                <a:spcPct val="115000"/>
+              </a:lnSpc>
+              <a:buNone/>
+            </a:pPr>
+            <a:r>
+              <a:rPr lang="en-US" sz="880" dirty="0">
                 <a:solidFill>
                   <a:srgbClr val="262626"/>
                 </a:solidFill>
@@ -6228,13 +9956,13 @@
               </a:rPr>
               <a:t>FY2026 OOSの再現改善（供給曲線上側の非定常対応）・九州でのout-of-sample</a:t>
             </a:r>
-            <a:endParaRPr lang="en-US" sz="950" dirty="0"/>
+            <a:endParaRPr lang="en-US" sz="880" dirty="0"/>
           </a:p>
         </p:txBody>
       </p:sp>
       <p:sp>
         <p:nvSpPr>
-          <p:cNvPr id="20" name="Shape 18"/>
+          <p:cNvPr id="23" name="Shape 21"/>
           <p:cNvSpPr/>
           <p:nvPr/>
         </p:nvSpPr>
@@ -6254,7 +9982,7 @@
       </p:sp>
       <p:sp>
         <p:nvSpPr>
-          <p:cNvPr id="21" name="Text 19"/>
+          <p:cNvPr id="24" name="Text 22"/>
           <p:cNvSpPr/>
           <p:nvPr/>
         </p:nvSpPr>
@@ -6299,9 +10027,9 @@
 </p:sld>
 </file>
 
-<file path=ppt/slides/slide12.xml><?xml version="1.0" encoding="utf-8"?>
+<file path=ppt/slides/slide13.xml><?xml version="1.0" encoding="utf-8"?>
 <p:sld xmlns:a="http://schemas.openxmlformats.org/drawingml/2006/main" xmlns:r="http://schemas.openxmlformats.org/officeDocument/2006/relationships" xmlns:p="http://schemas.openxmlformats.org/presentationml/2006/main">
-  <p:cSld name="Slide 12">
+  <p:cSld name="Slide 13">
     <p:bg>
       <p:bgPr>
         <a:solidFill>
@@ -6356,7 +10084,7 @@
                 <a:ea typeface="Noto Sans JP" pitchFamily="34" charset="-122"/>
                 <a:cs typeface="Noto Sans JP" pitchFamily="34" charset="-120"/>
               </a:rPr>
-              <a:t>12</a:t>
+              <a:t>13</a:t>
             </a:r>
             <a:endParaRPr lang="en-US" sz="900" dirty="0"/>
           </a:p>

--- a/thesis/slides/進捗報告_20260817_v3_風力蓄電池.pptx
+++ b/thesis/slides/進捗報告_20260817_v3_風力蓄電池.pptx
@@ -9249,7 +9249,7 @@
                 <a:ea typeface="Noto Sans JP SemiBold" pitchFamily="34" charset="-122"/>
                 <a:cs typeface="Noto Sans JP SemiBold" pitchFamily="34" charset="-120"/>
               </a:rPr>
-              <a:t>今後の方針 — 「風力×蓄電池の均衡容量K*」へ</a:t>
+              <a:t>今後の進め方</a:t>
             </a:r>
             <a:endParaRPr lang="en-US" sz="1900" dirty="0"/>
           </a:p>
@@ -9291,7 +9291,7 @@
                 <a:ea typeface="Noto Sans JP" pitchFamily="34" charset="-122"/>
                 <a:cs typeface="Noto Sans JP" pitchFamily="34" charset="-120"/>
               </a:rPr>
-              <a:t>スイープの上限を決める蓄電池自身の競合を内生化し、自由参入均衡のK*を解く。部品は実測済み</a:t>
+              <a:t>風力×蓄電池の初期分析の帰結として、「対象」と「手法」を次回までに確定する</a:t>
             </a:r>
             <a:endParaRPr lang="en-US" sz="1350" dirty="0"/>
           </a:p>
@@ -9328,8 +9328,8 @@
         </p:nvSpPr>
         <p:spPr>
           <a:xfrm>
-            <a:off x="548640" y="1371600"/>
-            <a:ext cx="5989320" cy="502920"/>
+            <a:off x="548640" y="1298448"/>
+            <a:ext cx="45720" cy="274320"/>
           </a:xfrm>
           <a:prstGeom prst="rect">
             <a:avLst/>
@@ -9348,185 +9348,8 @@
         </p:nvSpPr>
         <p:spPr>
           <a:xfrm>
-            <a:off x="777240" y="1371600"/>
-            <a:ext cx="5669280" cy="502920"/>
-          </a:xfrm>
-          <a:prstGeom prst="rect">
-            <a:avLst/>
-          </a:prstGeom>
-          <a:noFill/>
-          <a:ln/>
-        </p:spPr>
-        <p:txBody>
-          <a:bodyPr wrap="square" lIns="0" tIns="0" rIns="0" bIns="0" rtlCol="0" anchor="ctr"/>
-          <a:lstStyle/>
-          <a:p>
-            <a:pPr indent="0" marL="0">
-              <a:buNone/>
-            </a:pPr>
-            <a:r>
-              <a:rPr lang="en-US" sz="1300" b="1" dirty="0">
-                <a:solidFill>
-                  <a:srgbClr val="FFFFFF"/>
-                </a:solidFill>
-                <a:latin typeface="Noto Sans JP SemiBold" pitchFamily="34" charset="0"/>
-                <a:ea typeface="Noto Sans JP SemiBold" pitchFamily="34" charset="-122"/>
-                <a:cs typeface="Noto Sans JP SemiBold" pitchFamily="34" charset="-120"/>
-              </a:rPr>
-              <a:t>π_spot(K) ＋ κ(h)·P_cap(K) − c_req ＝ 0　→ K*</a:t>
-            </a:r>
-            <a:endParaRPr lang="en-US" sz="1300" dirty="0"/>
-          </a:p>
-        </p:txBody>
-      </p:sp>
-      <p:sp>
-        <p:nvSpPr>
-          <p:cNvPr id="8" name="Text 6"/>
-          <p:cNvSpPr/>
-          <p:nvPr/>
-        </p:nvSpPr>
-        <p:spPr>
-          <a:xfrm>
-            <a:off x="548640" y="2057400"/>
-            <a:ext cx="5989320" cy="3017520"/>
-          </a:xfrm>
-          <a:prstGeom prst="rect">
-            <a:avLst/>
-          </a:prstGeom>
-          <a:noFill/>
-          <a:ln/>
-        </p:spPr>
-        <p:txBody>
-          <a:bodyPr wrap="square" lIns="0" tIns="0" rIns="0" bIns="0" rtlCol="0" anchor="t"/>
-          <a:lstStyle/>
-          <a:p>
-            <a:pPr marL="152400" indent="-152400">
-              <a:lnSpc>
-                <a:spcPct val="120000"/>
-              </a:lnSpc>
-              <a:spcAft>
-                <a:spcPts val="800"/>
-              </a:spcAft>
-              <a:buSzPct val="100000"/>
-              <a:buChar char="■"/>
-            </a:pPr>
-            <a:r>
-              <a:rPr lang="en-US" sz="1100" dirty="0">
-                <a:solidFill>
-                  <a:srgbClr val="262626"/>
-                </a:solidFill>
-                <a:latin typeface="Noto Sans JP" pitchFamily="34" charset="0"/>
-                <a:ea typeface="Noto Sans JP" pitchFamily="34" charset="-122"/>
-                <a:cs typeface="Noto Sans JP" pitchFamily="34" charset="-120"/>
-              </a:rPr>
-              <a:t>主張の型: 「必然」は使わない。①現状K₀の利潤の符号（自由参入均衡か否か）②全シナリオでK*≥K_min（頑健下限コリドー）</a:t>
-            </a:r>
-            <a:endParaRPr lang="en-US" sz="1100" dirty="0"/>
-          </a:p>
-          <a:p>
-            <a:pPr marL="152400" indent="-152400">
-              <a:lnSpc>
-                <a:spcPct val="120000"/>
-              </a:lnSpc>
-              <a:spcAft>
-                <a:spcPts val="800"/>
-              </a:spcAft>
-              <a:buSzPct val="100000"/>
-              <a:buChar char="■"/>
-            </a:pPr>
-            <a:r>
-              <a:rPr lang="en-US" sz="1100" dirty="0">
-                <a:solidFill>
-                  <a:srgbClr val="262626"/>
-                </a:solidFill>
-                <a:latin typeface="Noto Sans JP" pitchFamily="34" charset="0"/>
-                <a:ea typeface="Noto Sans JP" pitchFamily="34" charset="-122"/>
-                <a:cs typeface="Noto Sans JP" pitchFamily="34" charset="-120"/>
-              </a:rPr>
-              <a:t>二層参入: LTDA（道内43.7万kW〜）・補助＝政策層（外生）／マーチャント層のみゼロ利潤</a:t>
-            </a:r>
-            <a:endParaRPr lang="en-US" sz="1100" dirty="0"/>
-          </a:p>
-          <a:p>
-            <a:pPr marL="152400" indent="-152400">
-              <a:lnSpc>
-                <a:spcPct val="120000"/>
-              </a:lnSpc>
-              <a:spcAft>
-                <a:spcPts val="800"/>
-              </a:spcAft>
-              <a:buSzPct val="100000"/>
-              <a:buChar char="■"/>
-            </a:pPr>
-            <a:r>
-              <a:rPr lang="en-US" sz="1100" dirty="0">
-                <a:solidFill>
-                  <a:srgbClr val="262626"/>
-                </a:solidFill>
-                <a:latin typeface="Noto Sans JP" pitchFamily="34" charset="0"/>
-                <a:ea typeface="Noto Sans JP" pitchFamily="34" charset="-122"/>
-                <a:cs typeface="Noto Sans JP" pitchFamily="34" charset="-120"/>
-              </a:rPr>
-              <a:t>部品は実測済み: κ(4h)=73→84%・P_cap=公表需要曲線・AFC(4h)=2.5〜3.0万円/kW-年＋託送等0.69万 → c_req≈3.2〜3.7万</a:t>
-            </a:r>
-            <a:endParaRPr lang="en-US" sz="1100" dirty="0"/>
-          </a:p>
-          <a:p>
-            <a:pPr marL="152400" indent="-152400">
-              <a:lnSpc>
-                <a:spcPct val="120000"/>
-              </a:lnSpc>
-              <a:spcAft>
-                <a:spcPts val="800"/>
-              </a:spcAft>
-              <a:buSzPct val="100000"/>
-              <a:buChar char="■"/>
-            </a:pPr>
-            <a:r>
-              <a:rPr lang="en-US" sz="1100" b="1" dirty="0">
-                <a:solidFill>
-                  <a:srgbClr val="262626"/>
-                </a:solidFill>
-                <a:latin typeface="Noto Sans JP" pitchFamily="34" charset="0"/>
-                <a:ea typeface="Noto Sans JP" pitchFamily="34" charset="-122"/>
-                <a:cs typeface="Noto Sans JP" pitchFamily="34" charset="-120"/>
-              </a:rPr>
-              <a:t>現状の純市場収入 約2.25万円/kW-年 ＜ c_req → 足元の参入は政策層駆動の可能性（どちらに転んでも論文が立つ2枝設計）</a:t>
-            </a:r>
-            <a:endParaRPr lang="en-US" sz="1100" dirty="0"/>
-          </a:p>
-        </p:txBody>
-      </p:sp>
-      <p:sp>
-        <p:nvSpPr>
-          <p:cNvPr id="9" name="Shape 7"/>
-          <p:cNvSpPr/>
-          <p:nvPr/>
-        </p:nvSpPr>
-        <p:spPr>
-          <a:xfrm>
-            <a:off x="6766560" y="1389888"/>
-            <a:ext cx="45720" cy="274320"/>
-          </a:xfrm>
-          <a:prstGeom prst="rect">
-            <a:avLst/>
-          </a:prstGeom>
-          <a:solidFill>
-            <a:srgbClr val="0079C2"/>
-          </a:solidFill>
-          <a:ln/>
-        </p:spPr>
-      </p:sp>
-      <p:sp>
-        <p:nvSpPr>
-          <p:cNvPr id="10" name="Text 8"/>
-          <p:cNvSpPr/>
-          <p:nvPr/>
-        </p:nvSpPr>
-        <p:spPr>
-          <a:xfrm>
-            <a:off x="6894576" y="1371600"/>
-            <a:ext cx="4754880" cy="310896"/>
+            <a:off x="676656" y="1280160"/>
+            <a:ext cx="10881360" cy="310896"/>
           </a:xfrm>
           <a:prstGeom prst="rect">
             <a:avLst/>
@@ -9550,7 +9373,7 @@
                 <a:ea typeface="Noto Sans JP SemiBold" pitchFamily="34" charset="-122"/>
                 <a:cs typeface="Noto Sans JP SemiBold" pitchFamily="34" charset="-120"/>
               </a:rPr>
-              <a:t>工程（次の3ヶ月）</a:t>
+              <a:t>発見① 風力は、スポット市場を通じては蓄電池のオプション価値をほとんど動かさない可能性</a:t>
             </a:r>
             <a:endParaRPr lang="en-US" sz="1300" dirty="0"/>
           </a:p>
@@ -9558,34 +9381,128 @@
       </p:sp>
       <p:sp>
         <p:nvSpPr>
-          <p:cNvPr id="11" name="Shape 9"/>
+          <p:cNvPr id="8" name="Text 6"/>
           <p:cNvSpPr/>
           <p:nvPr/>
         </p:nvSpPr>
         <p:spPr>
           <a:xfrm>
-            <a:off x="6766560" y="1783080"/>
-            <a:ext cx="4873752" cy="914400"/>
+            <a:off x="685800" y="1645920"/>
+            <a:ext cx="10881360" cy="1417320"/>
+          </a:xfrm>
+          <a:prstGeom prst="rect">
+            <a:avLst/>
+          </a:prstGeom>
+          <a:noFill/>
+          <a:ln/>
+        </p:spPr>
+        <p:txBody>
+          <a:bodyPr wrap="square" lIns="0" tIns="0" rIns="0" bIns="0" rtlCol="0" anchor="t"/>
+          <a:lstStyle/>
+          <a:p>
+            <a:pPr lvl="1" marL="254000" indent="-127000">
+              <a:lnSpc>
+                <a:spcPct val="120000"/>
+              </a:lnSpc>
+              <a:spcAft>
+                <a:spcPts val="500"/>
+              </a:spcAft>
+              <a:buSzPct val="100000"/>
+              <a:buChar char="–"/>
+            </a:pPr>
+            <a:r>
+              <a:rPr lang="en-US" sz="1150" dirty="0">
+                <a:solidFill>
+                  <a:srgbClr val="262626"/>
+                </a:solidFill>
+                <a:latin typeface="Noto Sans JP" pitchFamily="34" charset="0"/>
+                <a:ea typeface="Noto Sans JP" pitchFamily="34" charset="-122"/>
+                <a:cs typeface="Noto Sans JP" pitchFamily="34" charset="-120"/>
+              </a:rPr>
+              <a:t>価格カーブを平行移動させるだけで日内の「形」を作らない（変動の約3/4が1日超の長周期。日内帯は1割弱 — 太陽光の65%と対照的）</a:t>
+            </a:r>
+            <a:endParaRPr lang="en-US" sz="1150" dirty="0"/>
+          </a:p>
+          <a:p>
+            <a:pPr lvl="1" marL="254000" indent="-127000">
+              <a:lnSpc>
+                <a:spcPct val="120000"/>
+              </a:lnSpc>
+              <a:spcAft>
+                <a:spcPts val="500"/>
+              </a:spcAft>
+              <a:buSzPct val="100000"/>
+              <a:buChar char="–"/>
+            </a:pPr>
+            <a:r>
+              <a:rPr lang="en-US" sz="1150" dirty="0">
+                <a:solidFill>
+                  <a:srgbClr val="262626"/>
+                </a:solidFill>
+                <a:latin typeface="Noto Sans JP" pitchFamily="34" charset="0"/>
+                <a:ea typeface="Noto Sans JP" pitchFamily="34" charset="-122"/>
+                <a:cs typeface="Noto Sans JP" pitchFamily="34" charset="-120"/>
+              </a:rPr>
+              <a:t>実測でも風力大の日はスプレッド微減（冬−19%）。導入量を3倍まで振っても、価値は床（0.01円）経由の緩やかな増加に留まる</a:t>
+            </a:r>
+            <a:endParaRPr lang="en-US" sz="1150" dirty="0"/>
+          </a:p>
+          <a:p>
+            <a:pPr lvl="1" marL="254000" indent="-127000">
+              <a:lnSpc>
+                <a:spcPct val="120000"/>
+              </a:lnSpc>
+              <a:spcAft>
+                <a:spcPts val="500"/>
+              </a:spcAft>
+              <a:buSzPct val="100000"/>
+              <a:buChar char="–"/>
+            </a:pPr>
+            <a:r>
+              <a:rPr lang="en-US" sz="1150" b="1" dirty="0">
+                <a:solidFill>
+                  <a:srgbClr val="262626"/>
+                </a:solidFill>
+                <a:latin typeface="Noto Sans JP" pitchFamily="34" charset="0"/>
+                <a:ea typeface="Noto Sans JP" pitchFamily="34" charset="-122"/>
+                <a:cs typeface="Noto Sans JP" pitchFamily="34" charset="-120"/>
+              </a:rPr>
+              <a:t>→ 系統用（FTM）のスポット価値の源泉は夕方スパイクと床の形成であり、風力単独ではどちらも大きく動かせない</a:t>
+            </a:r>
+            <a:endParaRPr lang="en-US" sz="1150" dirty="0"/>
+          </a:p>
+        </p:txBody>
+      </p:sp>
+      <p:sp>
+        <p:nvSpPr>
+          <p:cNvPr id="9" name="Shape 7"/>
+          <p:cNvSpPr/>
+          <p:nvPr/>
+        </p:nvSpPr>
+        <p:spPr>
+          <a:xfrm>
+            <a:off x="548640" y="3127248"/>
+            <a:ext cx="45720" cy="274320"/>
           </a:xfrm>
           <a:prstGeom prst="rect">
             <a:avLst/>
           </a:prstGeom>
           <a:solidFill>
-            <a:srgbClr val="F0F6FB"/>
+            <a:srgbClr val="0079C2"/>
           </a:solidFill>
           <a:ln/>
         </p:spPr>
       </p:sp>
       <p:sp>
         <p:nvSpPr>
-          <p:cNvPr id="12" name="Text 10"/>
+          <p:cNvPr id="10" name="Text 8"/>
           <p:cNvSpPr/>
           <p:nvPr/>
         </p:nvSpPr>
         <p:spPr>
           <a:xfrm>
-            <a:off x="6967728" y="1847088"/>
-            <a:ext cx="4480560" cy="292608"/>
+            <a:off x="676656" y="3108960"/>
+            <a:ext cx="10881360" cy="310896"/>
           </a:xfrm>
           <a:prstGeom prst="rect">
             <a:avLst/>
@@ -9601,19 +9518,133 @@
               <a:buNone/>
             </a:pPr>
             <a:r>
-              <a:rPr lang="en-US" sz="1050" b="1" dirty="0">
+              <a:rPr lang="en-US" sz="1300" b="1" dirty="0">
                 <a:solidFill>
-                  <a:srgbClr val="176871"/>
+                  <a:srgbClr val="000000"/>
                 </a:solidFill>
                 <a:latin typeface="Noto Sans JP SemiBold" pitchFamily="34" charset="0"/>
                 <a:ea typeface="Noto Sans JP SemiBold" pitchFamily="34" charset="-122"/>
                 <a:cs typeface="Noto Sans JP SemiBold" pitchFamily="34" charset="-120"/>
               </a:rPr>
-              <a:t>フェーズC（主線）</a:t>
+              <a:t>発見② 一方で、併設（BTM）の価値算出には固有の意義がある可能性</a:t>
             </a:r>
-            <a:endParaRPr lang="en-US" sz="1050" dirty="0"/>
+            <a:endParaRPr lang="en-US" sz="1300" dirty="0"/>
           </a:p>
         </p:txBody>
+      </p:sp>
+      <p:sp>
+        <p:nvSpPr>
+          <p:cNvPr id="11" name="Text 9"/>
+          <p:cNvSpPr/>
+          <p:nvPr/>
+        </p:nvSpPr>
+        <p:spPr>
+          <a:xfrm>
+            <a:off x="685800" y="3474720"/>
+            <a:ext cx="10881360" cy="1417320"/>
+          </a:xfrm>
+          <a:prstGeom prst="rect">
+            <a:avLst/>
+          </a:prstGeom>
+          <a:noFill/>
+          <a:ln/>
+        </p:spPr>
+        <p:txBody>
+          <a:bodyPr wrap="square" lIns="0" tIns="0" rIns="0" bIns="0" rtlCol="0" anchor="t"/>
+          <a:lstStyle/>
+          <a:p>
+            <a:pPr lvl="1" marL="254000" indent="-127000">
+              <a:lnSpc>
+                <a:spcPct val="120000"/>
+              </a:lnSpc>
+              <a:spcAft>
+                <a:spcPts val="500"/>
+              </a:spcAft>
+              <a:buSzPct val="100000"/>
+              <a:buChar char="–"/>
+            </a:pPr>
+            <a:r>
+              <a:rPr lang="en-US" sz="1150" dirty="0">
+                <a:solidFill>
+                  <a:srgbClr val="262626"/>
+                </a:solidFill>
+                <a:latin typeface="Noto Sans JP" pitchFamily="34" charset="0"/>
+                <a:ea typeface="Noto Sans JP" pitchFamily="34" charset="-122"/>
+                <a:cs typeface="Noto Sans JP" pitchFamily="34" charset="-120"/>
+              </a:rPr>
+              <a:t>出力制御が立ち上がり（FY2025 0.1% → FY2026上期 1.35%）、その1割強はエリア価格が高い時間に発生 ＝ エリア価格に映らないローカル制約由来の価値</a:t>
+            </a:r>
+            <a:endParaRPr lang="en-US" sz="1150" dirty="0"/>
+          </a:p>
+          <a:p>
+            <a:pPr lvl="1" marL="254000" indent="-127000">
+              <a:lnSpc>
+                <a:spcPct val="120000"/>
+              </a:lnSpc>
+              <a:spcAft>
+                <a:spcPts val="500"/>
+              </a:spcAft>
+              <a:buSzPct val="100000"/>
+              <a:buChar char="–"/>
+            </a:pPr>
+            <a:r>
+              <a:rPr lang="en-US" sz="1150" dirty="0">
+                <a:solidFill>
+                  <a:srgbClr val="262626"/>
+                </a:solidFill>
+                <a:latin typeface="Noto Sans JP" pitchFamily="34" charset="0"/>
+                <a:ea typeface="Noto Sans JP" pitchFamily="34" charset="-122"/>
+                <a:cs typeface="Noto Sans JP" pitchFamily="34" charset="-120"/>
+              </a:rPr>
+              <a:t>エリア価格ベースの現行分析はBTM価値をゼロと計上（＝蓄電池価値の総体としては下限）。抑制回避価値は九州並み8%で約2,500円/kW風力-年へ</a:t>
+            </a:r>
+            <a:endParaRPr lang="en-US" sz="1150" dirty="0"/>
+          </a:p>
+          <a:p>
+            <a:pPr lvl="1" marL="254000" indent="-127000">
+              <a:lnSpc>
+                <a:spcPct val="120000"/>
+              </a:lnSpc>
+              <a:spcAft>
+                <a:spcPts val="500"/>
+              </a:spcAft>
+              <a:buSzPct val="100000"/>
+              <a:buChar char="–"/>
+            </a:pPr>
+            <a:r>
+              <a:rPr lang="en-US" sz="1150" b="1" dirty="0">
+                <a:solidFill>
+                  <a:srgbClr val="262626"/>
+                </a:solidFill>
+                <a:latin typeface="Noto Sans JP" pitchFamily="34" charset="0"/>
+                <a:ea typeface="Noto Sans JP" pitchFamily="34" charset="-122"/>
+                <a:cs typeface="Noto Sans JP" pitchFamily="34" charset="-120"/>
+              </a:rPr>
+              <a:t>→ 対象を「系統用（FTM）＋併設（BTM）」の二本立てへ拡張する価値がある</a:t>
+            </a:r>
+            <a:endParaRPr lang="en-US" sz="1150" dirty="0"/>
+          </a:p>
+        </p:txBody>
+      </p:sp>
+      <p:sp>
+        <p:nvSpPr>
+          <p:cNvPr id="12" name="Shape 10"/>
+          <p:cNvSpPr/>
+          <p:nvPr/>
+        </p:nvSpPr>
+        <p:spPr>
+          <a:xfrm>
+            <a:off x="548640" y="4956048"/>
+            <a:ext cx="45720" cy="274320"/>
+          </a:xfrm>
+          <a:prstGeom prst="rect">
+            <a:avLst/>
+          </a:prstGeom>
+          <a:solidFill>
+            <a:srgbClr val="0079C2"/>
+          </a:solidFill>
+          <a:ln/>
+        </p:spPr>
       </p:sp>
       <p:sp>
         <p:nvSpPr>
@@ -9623,70 +9654,8 @@
         </p:nvSpPr>
         <p:spPr>
           <a:xfrm>
-            <a:off x="6967728" y="2130552"/>
-            <a:ext cx="4480560" cy="548640"/>
-          </a:xfrm>
-          <a:prstGeom prst="rect">
-            <a:avLst/>
-          </a:prstGeom>
-          <a:noFill/>
-          <a:ln/>
-        </p:spPr>
-        <p:txBody>
-          <a:bodyPr wrap="square" lIns="0" tIns="0" rIns="0" bIns="0" rtlCol="0" anchor="ctr"/>
-          <a:lstStyle/>
-          <a:p>
-            <a:pPr indent="0" marL="0">
-              <a:lnSpc>
-                <a:spcPct val="115000"/>
-              </a:lnSpc>
-              <a:buNone/>
-            </a:pPr>
-            <a:r>
-              <a:rPr lang="en-US" sz="880" dirty="0">
-                <a:solidFill>
-                  <a:srgbClr val="262626"/>
-                </a:solidFill>
-                <a:latin typeface="Noto Sans JP" pitchFamily="34" charset="0"/>
-                <a:ea typeface="Noto Sans JP" pitchFamily="34" charset="-122"/>
-                <a:cs typeface="Noto Sans JP" pitchFamily="34" charset="-120"/>
-              </a:rPr>
-              <a:t>蓄電池フリートの充放電をnetに内生化 → π(K)曲線 → K*初回推計（充電側の託送・賦課金も控除）</a:t>
-            </a:r>
-            <a:endParaRPr lang="en-US" sz="880" dirty="0"/>
-          </a:p>
-        </p:txBody>
-      </p:sp>
-      <p:sp>
-        <p:nvSpPr>
-          <p:cNvPr id="14" name="Shape 12"/>
-          <p:cNvSpPr/>
-          <p:nvPr/>
-        </p:nvSpPr>
-        <p:spPr>
-          <a:xfrm>
-            <a:off x="6766560" y="2816352"/>
-            <a:ext cx="4873752" cy="914400"/>
-          </a:xfrm>
-          <a:prstGeom prst="rect">
-            <a:avLst/>
-          </a:prstGeom>
-          <a:solidFill>
-            <a:srgbClr val="F0F6FB"/>
-          </a:solidFill>
-          <a:ln/>
-        </p:spPr>
-      </p:sp>
-      <p:sp>
-        <p:nvSpPr>
-          <p:cNvPr id="15" name="Text 13"/>
-          <p:cNvSpPr/>
-          <p:nvPr/>
-        </p:nvSpPr>
-        <p:spPr>
-          <a:xfrm>
-            <a:off x="6967728" y="2880360"/>
-            <a:ext cx="4480560" cy="292608"/>
+            <a:off x="676656" y="4937760"/>
+            <a:ext cx="10881360" cy="310896"/>
           </a:xfrm>
           <a:prstGeom prst="rect">
             <a:avLst/>
@@ -9702,30 +9671,30 @@
               <a:buNone/>
             </a:pPr>
             <a:r>
-              <a:rPr lang="en-US" sz="1050" b="1" dirty="0">
+              <a:rPr lang="en-US" sz="1300" b="1" dirty="0">
                 <a:solidFill>
-                  <a:srgbClr val="176871"/>
+                  <a:srgbClr val="000000"/>
                 </a:solidFill>
                 <a:latin typeface="Noto Sans JP SemiBold" pitchFamily="34" charset="0"/>
                 <a:ea typeface="Noto Sans JP SemiBold" pitchFamily="34" charset="-122"/>
                 <a:cs typeface="Noto Sans JP SemiBold" pitchFamily="34" charset="-120"/>
               </a:rPr>
-              <a:t>K_wind×K格子</a:t>
+              <a:t>進め方: 手法は先行研究の整理と接続し、次回に確定</a:t>
             </a:r>
-            <a:endParaRPr lang="en-US" sz="1050" dirty="0"/>
+            <a:endParaRPr lang="en-US" sz="1300" dirty="0"/>
           </a:p>
         </p:txBody>
       </p:sp>
       <p:sp>
         <p:nvSpPr>
-          <p:cNvPr id="16" name="Text 14"/>
+          <p:cNvPr id="14" name="Text 12"/>
           <p:cNvSpPr/>
           <p:nvPr/>
         </p:nvSpPr>
         <p:spPr>
           <a:xfrm>
-            <a:off x="6967728" y="3163824"/>
-            <a:ext cx="4480560" cy="548640"/>
+            <a:off x="685800" y="5303520"/>
+            <a:ext cx="10881360" cy="914400"/>
           </a:xfrm>
           <a:prstGeom prst="rect">
             <a:avLst/>
@@ -9734,17 +9703,21 @@
           <a:ln/>
         </p:spPr>
         <p:txBody>
-          <a:bodyPr wrap="square" lIns="0" tIns="0" rIns="0" bIns="0" rtlCol="0" anchor="ctr"/>
+          <a:bodyPr wrap="square" lIns="0" tIns="0" rIns="0" bIns="0" rtlCol="0" anchor="t"/>
           <a:lstStyle/>
           <a:p>
-            <a:pPr indent="0" marL="0">
+            <a:pPr lvl="1" marL="254000" indent="-127000">
               <a:lnSpc>
-                <a:spcPct val="115000"/>
+                <a:spcPct val="120000"/>
               </a:lnSpc>
-              <a:buNone/>
+              <a:spcAft>
+                <a:spcPts val="500"/>
+              </a:spcAft>
+              <a:buSzPct val="100000"/>
+              <a:buChar char="–"/>
             </a:pPr>
             <a:r>
-              <a:rPr lang="en-US" sz="880" dirty="0">
+              <a:rPr lang="en-US" sz="1150" dirty="0">
                 <a:solidFill>
                   <a:srgbClr val="262626"/>
                 </a:solidFill>
@@ -9752,22 +9725,46 @@
                 <a:ea typeface="Noto Sans JP" pitchFamily="34" charset="-122"/>
                 <a:cs typeface="Noto Sans JP" pitchFamily="34" charset="-120"/>
               </a:rPr>
-              <a:t>スイープを2次元化: 風力導入量×蓄電池容量の価値サーフェス＝「風力何万kWにつき蓄電池何万kWが均衡か」</a:t>
+              <a:t>コア文献41本の整理は完了済み（均衡系: Butters 2025・Karaduman等／手法系: 完全予見LP＋ヘアカット・打ち切り分位点・実物オプション）</a:t>
             </a:r>
-            <a:endParaRPr lang="en-US" sz="880" dirty="0"/>
+            <a:endParaRPr lang="en-US" sz="1150" dirty="0"/>
+          </a:p>
+          <a:p>
+            <a:pPr lvl="1" marL="254000" indent="-127000">
+              <a:lnSpc>
+                <a:spcPct val="120000"/>
+              </a:lnSpc>
+              <a:spcAft>
+                <a:spcPts val="500"/>
+              </a:spcAft>
+              <a:buSzPct val="100000"/>
+              <a:buChar char="–"/>
+            </a:pPr>
+            <a:r>
+              <a:rPr lang="en-US" sz="1150" dirty="0">
+                <a:solidFill>
+                  <a:srgbClr val="262626"/>
+                </a:solidFill>
+                <a:latin typeface="Noto Sans JP" pitchFamily="34" charset="0"/>
+                <a:ea typeface="Noto Sans JP" pitchFamily="34" charset="-122"/>
+                <a:cs typeface="Noto Sans JP" pitchFamily="34" charset="-120"/>
+              </a:rPr>
+              <a:t>次回まで: ①FTM＝蓄電池競合を内生化したπ(K)曲線→均衡容量の初回推計 ②BTM＝抑制イベントの分解と容量制約下の回避可能率 ③共通基盤＝価格過程の改良</a:t>
+            </a:r>
+            <a:endParaRPr lang="en-US" sz="1150" dirty="0"/>
           </a:p>
         </p:txBody>
       </p:sp>
       <p:sp>
         <p:nvSpPr>
-          <p:cNvPr id="17" name="Shape 15"/>
+          <p:cNvPr id="15" name="Shape 13"/>
           <p:cNvSpPr/>
           <p:nvPr/>
         </p:nvSpPr>
         <p:spPr>
           <a:xfrm>
-            <a:off x="6766560" y="3849624"/>
-            <a:ext cx="4873752" cy="914400"/>
+            <a:off x="548640" y="6172200"/>
+            <a:ext cx="11091672" cy="457200"/>
           </a:xfrm>
           <a:prstGeom prst="rect">
             <a:avLst/>
@@ -9780,14 +9777,14 @@
       </p:sp>
       <p:sp>
         <p:nvSpPr>
-          <p:cNvPr id="18" name="Text 16"/>
+          <p:cNvPr id="16" name="Text 14"/>
           <p:cNvSpPr/>
           <p:nvPr/>
         </p:nvSpPr>
         <p:spPr>
           <a:xfrm>
-            <a:off x="6967728" y="3913632"/>
-            <a:ext cx="4480560" cy="292608"/>
+            <a:off x="777240" y="6172200"/>
+            <a:ext cx="10607040" cy="457200"/>
           </a:xfrm>
           <a:prstGeom prst="rect">
             <a:avLst/>
@@ -9803,7 +9800,7 @@
               <a:buNone/>
             </a:pPr>
             <a:r>
-              <a:rPr lang="en-US" sz="1050" b="1" dirty="0">
+              <a:rPr lang="en-US" sz="1150" b="1" dirty="0">
                 <a:solidFill>
                   <a:srgbClr val="176871"/>
                 </a:solidFill>
@@ -9811,211 +9808,9 @@
                 <a:ea typeface="Noto Sans JP SemiBold" pitchFamily="34" charset="-122"/>
                 <a:cs typeface="Noto Sans JP SemiBold" pitchFamily="34" charset="-120"/>
               </a:rPr>
-              <a:t>BTM分析（フェーズCの副産物として）</a:t>
+              <a:t>次回のゴール: 先行研究を踏まえた手法・対象の確定（研究計画の凍結）</a:t>
             </a:r>
-            <a:endParaRPr lang="en-US" sz="1050" dirty="0"/>
-          </a:p>
-        </p:txBody>
-      </p:sp>
-      <p:sp>
-        <p:nvSpPr>
-          <p:cNvPr id="19" name="Text 17"/>
-          <p:cNvSpPr/>
-          <p:nvPr/>
-        </p:nvSpPr>
-        <p:spPr>
-          <a:xfrm>
-            <a:off x="6967728" y="4197096"/>
-            <a:ext cx="4480560" cy="548640"/>
-          </a:xfrm>
-          <a:prstGeom prst="rect">
-            <a:avLst/>
-          </a:prstGeom>
-          <a:noFill/>
-          <a:ln/>
-        </p:spPr>
-        <p:txBody>
-          <a:bodyPr wrap="square" lIns="0" tIns="0" rIns="0" bIns="0" rtlCol="0" anchor="ctr"/>
-          <a:lstStyle/>
-          <a:p>
-            <a:pPr indent="0" marL="0">
-              <a:lnSpc>
-                <a:spcPct val="115000"/>
-              </a:lnSpc>
-              <a:buNone/>
-            </a:pPr>
-            <a:r>
-              <a:rPr lang="en-US" sz="880" dirty="0">
-                <a:solidFill>
-                  <a:srgbClr val="262626"/>
-                </a:solidFill>
-                <a:latin typeface="Noto Sans JP" pitchFamily="34" charset="0"/>
-                <a:ea typeface="Noto Sans JP" pitchFamily="34" charset="-122"/>
-                <a:cs typeface="Noto Sans JP" pitchFamily="34" charset="-120"/>
-              </a:rPr>
-              <a:t>抑制イベントの分解（エリア余剰型/ローカル型）→ 0.64kWh/kW容量制約下の回避可能率 → π_BTM参入条件。系統別抑制実績の取得（DLリストC5）</a:t>
-            </a:r>
-            <a:endParaRPr lang="en-US" sz="880" dirty="0"/>
-          </a:p>
-        </p:txBody>
-      </p:sp>
-      <p:sp>
-        <p:nvSpPr>
-          <p:cNvPr id="20" name="Shape 18"/>
-          <p:cNvSpPr/>
-          <p:nvPr/>
-        </p:nvSpPr>
-        <p:spPr>
-          <a:xfrm>
-            <a:off x="6766560" y="4882896"/>
-            <a:ext cx="4873752" cy="914400"/>
-          </a:xfrm>
-          <a:prstGeom prst="rect">
-            <a:avLst/>
-          </a:prstGeom>
-          <a:solidFill>
-            <a:srgbClr val="F0F6FB"/>
-          </a:solidFill>
-          <a:ln/>
-        </p:spPr>
-      </p:sp>
-      <p:sp>
-        <p:nvSpPr>
-          <p:cNvPr id="21" name="Text 19"/>
-          <p:cNvSpPr/>
-          <p:nvPr/>
-        </p:nvSpPr>
-        <p:spPr>
-          <a:xfrm>
-            <a:off x="6967728" y="4946904"/>
-            <a:ext cx="4480560" cy="292608"/>
-          </a:xfrm>
-          <a:prstGeom prst="rect">
-            <a:avLst/>
-          </a:prstGeom>
-          <a:noFill/>
-          <a:ln/>
-        </p:spPr>
-        <p:txBody>
-          <a:bodyPr wrap="square" lIns="0" tIns="0" rIns="0" bIns="0" rtlCol="0" anchor="ctr"/>
-          <a:lstStyle/>
-          <a:p>
-            <a:pPr indent="0" marL="0">
-              <a:buNone/>
-            </a:pPr>
-            <a:r>
-              <a:rPr lang="en-US" sz="1050" b="1" dirty="0">
-                <a:solidFill>
-                  <a:srgbClr val="176871"/>
-                </a:solidFill>
-                <a:latin typeface="Noto Sans JP SemiBold" pitchFamily="34" charset="0"/>
-                <a:ea typeface="Noto Sans JP SemiBold" pitchFamily="34" charset="-122"/>
-                <a:cs typeface="Noto Sans JP SemiBold" pitchFamily="34" charset="-120"/>
-              </a:rPr>
-              <a:t>検証</a:t>
-            </a:r>
-            <a:endParaRPr lang="en-US" sz="1050" dirty="0"/>
-          </a:p>
-        </p:txBody>
-      </p:sp>
-      <p:sp>
-        <p:nvSpPr>
-          <p:cNvPr id="22" name="Text 20"/>
-          <p:cNvSpPr/>
-          <p:nvPr/>
-        </p:nvSpPr>
-        <p:spPr>
-          <a:xfrm>
-            <a:off x="6967728" y="5230368"/>
-            <a:ext cx="4480560" cy="548640"/>
-          </a:xfrm>
-          <a:prstGeom prst="rect">
-            <a:avLst/>
-          </a:prstGeom>
-          <a:noFill/>
-          <a:ln/>
-        </p:spPr>
-        <p:txBody>
-          <a:bodyPr wrap="square" lIns="0" tIns="0" rIns="0" bIns="0" rtlCol="0" anchor="ctr"/>
-          <a:lstStyle/>
-          <a:p>
-            <a:pPr indent="0" marL="0">
-              <a:lnSpc>
-                <a:spcPct val="115000"/>
-              </a:lnSpc>
-              <a:buNone/>
-            </a:pPr>
-            <a:r>
-              <a:rPr lang="en-US" sz="880" dirty="0">
-                <a:solidFill>
-                  <a:srgbClr val="262626"/>
-                </a:solidFill>
-                <a:latin typeface="Noto Sans JP" pitchFamily="34" charset="0"/>
-                <a:ea typeface="Noto Sans JP" pitchFamily="34" charset="-122"/>
-                <a:cs typeface="Noto Sans JP" pitchFamily="34" charset="-120"/>
-              </a:rPr>
-              <a:t>FY2026 OOSの再現改善（供給曲線上側の非定常対応）・九州でのout-of-sample</a:t>
-            </a:r>
-            <a:endParaRPr lang="en-US" sz="880" dirty="0"/>
-          </a:p>
-        </p:txBody>
-      </p:sp>
-      <p:sp>
-        <p:nvSpPr>
-          <p:cNvPr id="23" name="Shape 21"/>
-          <p:cNvSpPr/>
-          <p:nvPr/>
-        </p:nvSpPr>
-        <p:spPr>
-          <a:xfrm>
-            <a:off x="548640" y="5760720"/>
-            <a:ext cx="11091672" cy="566928"/>
-          </a:xfrm>
-          <a:prstGeom prst="rect">
-            <a:avLst/>
-          </a:prstGeom>
-          <a:solidFill>
-            <a:srgbClr val="F0F6FB"/>
-          </a:solidFill>
-          <a:ln/>
-        </p:spPr>
-      </p:sp>
-      <p:sp>
-        <p:nvSpPr>
-          <p:cNvPr id="24" name="Text 22"/>
-          <p:cNvSpPr/>
-          <p:nvPr/>
-        </p:nvSpPr>
-        <p:spPr>
-          <a:xfrm>
-            <a:off x="777240" y="5760720"/>
-            <a:ext cx="10607040" cy="566928"/>
-          </a:xfrm>
-          <a:prstGeom prst="rect">
-            <a:avLst/>
-          </a:prstGeom>
-          <a:noFill/>
-          <a:ln/>
-        </p:spPr>
-        <p:txBody>
-          <a:bodyPr wrap="square" lIns="0" tIns="0" rIns="0" bIns="0" rtlCol="0" anchor="ctr"/>
-          <a:lstStyle/>
-          <a:p>
-            <a:pPr indent="0" marL="0">
-              <a:buNone/>
-            </a:pPr>
-            <a:r>
-              <a:rPr lang="en-US" sz="1050" b="1" dirty="0">
-                <a:solidFill>
-                  <a:srgbClr val="176871"/>
-                </a:solidFill>
-                <a:latin typeface="Noto Sans JP SemiBold" pitchFamily="34" charset="0"/>
-                <a:ea typeface="Noto Sans JP SemiBold" pitchFamily="34" charset="-122"/>
-                <a:cs typeface="Noto Sans JP SemiBold" pitchFamily="34" charset="-120"/>
-              </a:rPr>
-              <a:t>本日の実証の役割: 価格カーブ（平行シフト）・床の生成・capture率（ヘアカット18-19%）・duration曲線が、そのまま均衡モデルの入力・校正材料になる</a:t>
-            </a:r>
-            <a:endParaRPr lang="en-US" sz="1050" dirty="0"/>
+            <a:endParaRPr lang="en-US" sz="1150" dirty="0"/>
           </a:p>
         </p:txBody>
       </p:sp>
